--- a/presentations/PF_L05_ArrayYard_Lesson.pptx
+++ b/presentations/PF_L05_ArrayYard_Lesson.pptx
@@ -19,9 +19,10 @@
     <p:sldId id="267" r:id="rId13"/>
     <p:sldId id="268" r:id="rId14"/>
     <p:sldId id="269" r:id="rId15"/>
+    <p:sldId id="270" r:id="rId16"/>
   </p:sldIdLst>
   <p:notesMasterIdLst>
-    <p:notesMasterId r:id="rId16"/>
+    <p:notesMasterId r:id="rId17"/>
   </p:notesMasterIdLst>
   <p:sldSz cx="12192000" cy="6858000"/>
   <p:notesSz cx="6858000" cy="12192000"/>
@@ -692,7 +693,13 @@
           <a:p>
             <a:r>
               <a:rPr lang="en-US" dirty="0"/>
-              <a:t>Make them commit to an answer on paper before they tap the star. Guessing first costs them the learning.</a:t>
+              <a:t>The answer is B: A function returns a value to the code that called it, and a procedure does not.
+Do not say it yet. Every pupil commits first - fingers, whiteboards or a show of hands on each letter in turn - and you count the split before anyone can change their mind.
+IF MOST OF THE CLASS IS RIGHT: say why it is right in one sentence and go straight on to the independent work.
+IF A SIGNIFICANT GROUP IS ON ONE WRONG LETTER: that option is the misconception to teach against before anyone goes on. Go back to station 4, Procedures and functions, and work through its example again, aloud, with the class watching, then re-ask this question.
+The course's own response to a wrong answer here: Both are sub-programs and both can take parameters. The return value is the only difference.
+A limitation, stated rather than papered over: one response covers every wrong option; it does not say what to revisit for each one. The course does not record what each separate wrong option means, and this slide does not invent it. Decide your own reteach for each option before the lesson; the options above are the start of it.
+This is a real activity from the experience (pf-l05-s4-c1), so the wording here is the wording a pupil will see.</a:t>
             </a:r>
             <a:endParaRPr lang="en-US" dirty="0"/>
           </a:p>
@@ -780,7 +787,7 @@
           <a:p>
             <a:r>
               <a:rPr lang="en-US" dirty="0"/>
-              <a:t>Use these as a settler, or as something for early finishers to read in the experience.</a:t>
+              <a:t>Make them commit to an answer on paper before they tap the star. Guessing first costs them the learning.</a:t>
             </a:r>
             <a:endParaRPr lang="en-US" dirty="0"/>
           </a:p>
@@ -868,7 +875,7 @@
           <a:p>
             <a:r>
               <a:rPr lang="en-US" dirty="0"/>
-              <a:t>Timed and silent. Mark against the answer sheet, then ask students to record their weakest area.</a:t>
+              <a:t>Use these as a settler, or as something for early finishers to read in the experience.</a:t>
             </a:r>
             <a:endParaRPr lang="en-US" dirty="0"/>
           </a:p>
@@ -956,7 +963,7 @@
           <a:p>
             <a:r>
               <a:rPr lang="en-US" dirty="0"/>
-              <a:t>Students copy their score-screen breakdown onto the worksheet, then rate themselves here.</a:t>
+              <a:t>Timed and silent. Mark against the answer sheet, then ask students to record their weakest area.</a:t>
             </a:r>
             <a:endParaRPr lang="en-US" dirty="0"/>
           </a:p>
@@ -980,6 +987,94 @@
             <a:fld id="{F7021451-1387-4CA6-816F-3879F97B5CBC}" type="slidenum">
               <a:rPr lang="en-US"/>
               <a:t>14</a:t>
+            </a:fld>
+            <a:endParaRPr lang="en-US"/>
+          </a:p>
+        </p:txBody>
+      </p:sp>
+    </p:spTree>
+    <p:extLst>
+      <p:ext uri="{BB962C8B-B14F-4D97-AF65-F5344CB8AC3E}">
+        <p14:creationId xmlns:p14="http://schemas.microsoft.com/office/powerpoint/2010/main" val="1024086991"/>
+      </p:ext>
+    </p:extLst>
+  </p:cSld>
+  <p:clrMapOvr>
+    <a:masterClrMapping/>
+  </p:clrMapOvr>
+</p:notes>
+</file>
+
+<file path=ppt/notesSlides/notesSlide15.xml><?xml version="1.0" encoding="utf-8"?>
+<p:notes xmlns:a="http://schemas.openxmlformats.org/drawingml/2006/main" xmlns:r="http://schemas.openxmlformats.org/officeDocument/2006/relationships" xmlns:p="http://schemas.openxmlformats.org/presentationml/2006/main">
+  <p:cSld>
+    <p:spTree>
+      <p:nvGrpSpPr>
+        <p:cNvPr id="1" name=""/>
+        <p:cNvGrpSpPr/>
+        <p:nvPr/>
+      </p:nvGrpSpPr>
+      <p:grpSpPr>
+        <a:xfrm>
+          <a:off x="0" y="0"/>
+          <a:ext cx="0" cy="0"/>
+          <a:chOff x="0" y="0"/>
+          <a:chExt cx="0" cy="0"/>
+        </a:xfrm>
+      </p:grpSpPr>
+      <p:sp>
+        <p:nvSpPr>
+          <p:cNvPr id="2" name="Slide Image Placeholder 1"/>
+          <p:cNvSpPr>
+            <a:spLocks noGrp="1" noRot="1" noChangeAspect="1"/>
+          </p:cNvSpPr>
+          <p:nvPr>
+            <p:ph type="sldImg"/>
+          </p:nvPr>
+        </p:nvSpPr>
+        <p:spPr/>
+      </p:sp>
+      <p:sp>
+        <p:nvSpPr>
+          <p:cNvPr id="3" name="Notes Placeholder 2"/>
+          <p:cNvSpPr>
+            <a:spLocks noGrp="1"/>
+          </p:cNvSpPr>
+          <p:nvPr>
+            <p:ph type="body" idx="1"/>
+          </p:nvPr>
+        </p:nvSpPr>
+        <p:spPr/>
+        <p:txBody>
+          <a:bodyPr/>
+          <a:lstStyle/>
+          <a:p>
+            <a:r>
+              <a:rPr lang="en-US" dirty="0"/>
+              <a:t>Students copy their score-screen breakdown onto the worksheet, then rate themselves here.</a:t>
+            </a:r>
+            <a:endParaRPr lang="en-US" dirty="0"/>
+          </a:p>
+        </p:txBody>
+      </p:sp>
+      <p:sp>
+        <p:nvSpPr>
+          <p:cNvPr id="4" name="Slide Number Placeholder 3"/>
+          <p:cNvSpPr>
+            <a:spLocks noGrp="1"/>
+          </p:cNvSpPr>
+          <p:nvPr>
+            <p:ph type="sldNum" sz="quarter" idx="10"/>
+          </p:nvPr>
+        </p:nvSpPr>
+        <p:spPr/>
+        <p:txBody>
+          <a:bodyPr/>
+          <a:lstStyle/>
+          <a:p>
+            <a:fld id="{F7021451-1387-4CA6-816F-3879F97B5CBC}" type="slidenum">
+              <a:rPr lang="en-US"/>
+              <a:t>15</a:t>
             </a:fld>
             <a:endParaRPr lang="en-US"/>
           </a:p>
@@ -2949,12 +3044,12 @@
         </p:nvSpPr>
         <p:spPr>
           <a:xfrm>
-            <a:off x="502920" y="438912"/>
-            <a:ext cx="3108960" cy="502920"/>
+            <a:off x="502920" y="457200"/>
+            <a:ext cx="1051560" cy="420624"/>
           </a:xfrm>
           <a:prstGeom prst="roundRect">
             <a:avLst>
-              <a:gd name="adj" fmla="val 18182"/>
+              <a:gd name="adj" fmla="val 21739"/>
             </a:avLst>
           </a:prstGeom>
           <a:solidFill>
@@ -2971,8 +3066,8 @@
         </p:nvSpPr>
         <p:spPr>
           <a:xfrm>
-            <a:off x="502920" y="438912"/>
-            <a:ext cx="3108960" cy="502920"/>
+            <a:off x="502920" y="457200"/>
+            <a:ext cx="1051560" cy="420624"/>
           </a:xfrm>
           <a:prstGeom prst="rect">
             <a:avLst/>
@@ -2988,7 +3083,7 @@
               <a:buNone/>
             </a:pPr>
             <a:r>
-              <a:rPr lang="en-US" sz="1300" b="1" dirty="0">
+              <a:rPr lang="en-US" sz="1200" b="1" dirty="0">
                 <a:solidFill>
                   <a:srgbClr val="101828"/>
                 </a:solidFill>
@@ -2996,9 +3091,9 @@
                 <a:ea typeface="IBM Plex Mono" pitchFamily="34" charset="-122"/>
                 <a:cs typeface="IBM Plex Mono" pitchFamily="34" charset="-120"/>
               </a:rPr>
-              <a:t>★  FINAL CHALLENGE</a:t>
-            </a:r>
-            <a:endParaRPr lang="en-US" sz="1300" dirty="0"/>
+              <a:t>CHECK</a:t>
+            </a:r>
+            <a:endParaRPr lang="en-US" sz="1200" dirty="0"/>
           </a:p>
         </p:txBody>
       </p:sp>
@@ -3010,8 +3105,8 @@
         </p:nvSpPr>
         <p:spPr>
           <a:xfrm>
-            <a:off x="502920" y="1097280"/>
-            <a:ext cx="11155680" cy="731520"/>
+            <a:off x="1737360" y="457200"/>
+            <a:ext cx="9875520" cy="420624"/>
           </a:xfrm>
           <a:prstGeom prst="rect">
             <a:avLst/>
@@ -3027,34 +3122,76 @@
               <a:buNone/>
             </a:pPr>
             <a:r>
-              <a:rPr lang="en-US" sz="3400" b="1" dirty="0">
-                <a:solidFill>
-                  <a:srgbClr val="101828"/>
+              <a:rPr lang="en-US" sz="1500" dirty="0">
+                <a:solidFill>
+                  <a:srgbClr val="667085"/>
                 </a:solidFill>
                 <a:latin typeface="IBM Plex Sans" pitchFamily="34" charset="0"/>
                 <a:ea typeface="IBM Plex Sans" pitchFamily="34" charset="-122"/>
                 <a:cs typeface="IBM Plex Sans" pitchFamily="34" charset="-120"/>
               </a:rPr>
-              <a:t>Total the crates</a:t>
-            </a:r>
-            <a:endParaRPr lang="en-US" sz="3400" dirty="0"/>
-          </a:p>
-        </p:txBody>
-      </p:sp>
-      <p:sp>
-        <p:nvSpPr>
-          <p:cNvPr id="8" name="Shape 6"/>
+              <a:t>Hands down. Everyone commits.</a:t>
+            </a:r>
+            <a:endParaRPr lang="en-US" sz="1500" dirty="0"/>
+          </a:p>
+        </p:txBody>
+      </p:sp>
+      <p:sp>
+        <p:nvSpPr>
+          <p:cNvPr id="8" name="Text 6"/>
+          <p:cNvSpPr txBox="1"/>
+          <p:nvPr/>
+        </p:nvSpPr>
+        <p:spPr>
+          <a:xfrm>
+            <a:off x="502920" y="1097280"/>
+            <a:ext cx="11155680" cy="914400"/>
+          </a:xfrm>
+          <a:prstGeom prst="rect">
+            <a:avLst/>
+          </a:prstGeom>
+          <a:noFill/>
+          <a:ln/>
+        </p:spPr>
+        <p:txBody>
+          <a:bodyPr wrap="square" lIns="0" tIns="0" rIns="0" bIns="0" rtlCol="0" anchor="ctr"/>
+          <a:lstStyle/>
+          <a:p>
+            <a:pPr indent="0" marL="0">
+              <a:lnSpc>
+                <a:spcPct val="115000"/>
+              </a:lnSpc>
+              <a:buNone/>
+            </a:pPr>
+            <a:r>
+              <a:rPr lang="en-US" sz="2600" b="1" dirty="0">
+                <a:solidFill>
+                  <a:srgbClr val="101828"/>
+                </a:solidFill>
+                <a:latin typeface="IBM Plex Sans" pitchFamily="34" charset="0"/>
+                <a:ea typeface="IBM Plex Sans" pitchFamily="34" charset="-122"/>
+                <a:cs typeface="IBM Plex Sans" pitchFamily="34" charset="-120"/>
+              </a:rPr>
+              <a:t>What is the difference between a procedure and a function?</a:t>
+            </a:r>
+            <a:endParaRPr lang="en-US" sz="2600" dirty="0"/>
+          </a:p>
+        </p:txBody>
+      </p:sp>
+      <p:sp>
+        <p:nvSpPr>
+          <p:cNvPr id="9" name="Shape 7"/>
           <p:cNvSpPr/>
           <p:nvPr/>
         </p:nvSpPr>
         <p:spPr>
           <a:xfrm>
-            <a:off x="502920" y="2011680"/>
-            <a:ext cx="11155680" cy="2194560"/>
+            <a:off x="502920" y="2148840"/>
+            <a:ext cx="11155680" cy="731520"/>
           </a:xfrm>
           <a:prstGeom prst="roundRect">
             <a:avLst>
-              <a:gd name="adj" fmla="val 5000"/>
+              <a:gd name="adj" fmla="val 15000"/>
             </a:avLst>
           </a:prstGeom>
           <a:solidFill>
@@ -3062,7 +3199,7 @@
           </a:solidFill>
           <a:ln w="15875">
             <a:solidFill>
-              <a:srgbClr val="2D63FF"/>
+              <a:srgbClr val="D9DEE7"/>
             </a:solidFill>
             <a:prstDash val="solid"/>
           </a:ln>
@@ -3070,14 +3207,75 @@
       </p:sp>
       <p:sp>
         <p:nvSpPr>
-          <p:cNvPr id="9" name="Text 7"/>
-          <p:cNvSpPr txBox="1"/>
-          <p:nvPr/>
-        </p:nvSpPr>
-        <p:spPr>
-          <a:xfrm>
-            <a:off x="1005840" y="2331720"/>
-            <a:ext cx="10149840" cy="1554480"/>
+          <p:cNvPr id="10" name="Shape 8"/>
+          <p:cNvSpPr/>
+          <p:nvPr/>
+        </p:nvSpPr>
+        <p:spPr>
+          <a:xfrm>
+            <a:off x="777240" y="2295144"/>
+            <a:ext cx="438912" cy="438912"/>
+          </a:xfrm>
+          <a:prstGeom prst="roundRect">
+            <a:avLst>
+              <a:gd name="adj" fmla="val 20833"/>
+            </a:avLst>
+          </a:prstGeom>
+          <a:solidFill>
+            <a:srgbClr val="EEF2FB"/>
+          </a:solidFill>
+          <a:ln/>
+        </p:spPr>
+      </p:sp>
+      <p:sp>
+        <p:nvSpPr>
+          <p:cNvPr id="11" name="Text 9"/>
+          <p:cNvSpPr txBox="1"/>
+          <p:nvPr/>
+        </p:nvSpPr>
+        <p:spPr>
+          <a:xfrm>
+            <a:off x="777240" y="2295144"/>
+            <a:ext cx="438912" cy="438912"/>
+          </a:xfrm>
+          <a:prstGeom prst="rect">
+            <a:avLst/>
+          </a:prstGeom>
+          <a:noFill/>
+          <a:ln/>
+        </p:spPr>
+        <p:txBody>
+          <a:bodyPr wrap="square" lIns="0" tIns="0" rIns="0" bIns="0" rtlCol="0" anchor="ctr"/>
+          <a:lstStyle/>
+          <a:p>
+            <a:pPr algn="ctr" indent="0" marL="0">
+              <a:buNone/>
+            </a:pPr>
+            <a:r>
+              <a:rPr lang="en-US" sz="1300" b="1" dirty="0">
+                <a:solidFill>
+                  <a:srgbClr val="2D63FF"/>
+                </a:solidFill>
+                <a:latin typeface="IBM Plex Mono" pitchFamily="34" charset="0"/>
+                <a:ea typeface="IBM Plex Mono" pitchFamily="34" charset="-122"/>
+                <a:cs typeface="IBM Plex Mono" pitchFamily="34" charset="-120"/>
+              </a:rPr>
+              <a:t>A</a:t>
+            </a:r>
+            <a:endParaRPr lang="en-US" sz="1300" dirty="0"/>
+          </a:p>
+        </p:txBody>
+      </p:sp>
+      <p:sp>
+        <p:nvSpPr>
+          <p:cNvPr id="12" name="Text 10"/>
+          <p:cNvSpPr txBox="1"/>
+          <p:nvPr/>
+        </p:nvSpPr>
+        <p:spPr>
+          <a:xfrm>
+            <a:off x="1417320" y="2148840"/>
+            <a:ext cx="10058400" cy="731520"/>
           </a:xfrm>
           <a:prstGeom prst="rect">
             <a:avLst/>
@@ -3091,12 +3289,12 @@
           <a:p>
             <a:pPr indent="0" marL="0">
               <a:lnSpc>
-                <a:spcPct val="130000"/>
+                <a:spcPct val="115000"/>
               </a:lnSpc>
               <a:buNone/>
             </a:pPr>
             <a:r>
-              <a:rPr lang="en-US" sz="2200" dirty="0">
+              <a:rPr lang="en-US" sz="1700" dirty="0">
                 <a:solidFill>
                   <a:srgbClr val="101828"/>
                 </a:solidFill>
@@ -3104,22 +3302,110 @@
                 <a:ea typeface="IBM Plex Sans" pitchFamily="34" charset="-122"/>
                 <a:cs typeface="IBM Plex Sans" pitchFamily="34" charset="-120"/>
               </a:rPr>
-              <a:t>Six lines of the OCR Exam Reference Language, jumbled. Tap the star and put them into a working program that adds up all five crate weights and outputs the total.</a:t>
-            </a:r>
-            <a:endParaRPr lang="en-US" sz="2200" dirty="0"/>
-          </a:p>
-        </p:txBody>
-      </p:sp>
-      <p:sp>
-        <p:nvSpPr>
-          <p:cNvPr id="10" name="Text 8"/>
-          <p:cNvSpPr txBox="1"/>
-          <p:nvPr/>
-        </p:nvSpPr>
-        <p:spPr>
-          <a:xfrm>
-            <a:off x="502920" y="4526280"/>
-            <a:ext cx="11155680" cy="457200"/>
+              <a:t>A procedure may be given parameters, and a function may not</a:t>
+            </a:r>
+            <a:endParaRPr lang="en-US" sz="1700" dirty="0"/>
+          </a:p>
+        </p:txBody>
+      </p:sp>
+      <p:sp>
+        <p:nvSpPr>
+          <p:cNvPr id="13" name="Shape 11"/>
+          <p:cNvSpPr/>
+          <p:nvPr/>
+        </p:nvSpPr>
+        <p:spPr>
+          <a:xfrm>
+            <a:off x="502920" y="3017520"/>
+            <a:ext cx="11155680" cy="731520"/>
+          </a:xfrm>
+          <a:prstGeom prst="roundRect">
+            <a:avLst>
+              <a:gd name="adj" fmla="val 15000"/>
+            </a:avLst>
+          </a:prstGeom>
+          <a:solidFill>
+            <a:srgbClr val="FFFFFF"/>
+          </a:solidFill>
+          <a:ln w="15875">
+            <a:solidFill>
+              <a:srgbClr val="D9DEE7"/>
+            </a:solidFill>
+            <a:prstDash val="solid"/>
+          </a:ln>
+        </p:spPr>
+      </p:sp>
+      <p:sp>
+        <p:nvSpPr>
+          <p:cNvPr id="14" name="Shape 12"/>
+          <p:cNvSpPr/>
+          <p:nvPr/>
+        </p:nvSpPr>
+        <p:spPr>
+          <a:xfrm>
+            <a:off x="777240" y="3163824"/>
+            <a:ext cx="438912" cy="438912"/>
+          </a:xfrm>
+          <a:prstGeom prst="roundRect">
+            <a:avLst>
+              <a:gd name="adj" fmla="val 20833"/>
+            </a:avLst>
+          </a:prstGeom>
+          <a:solidFill>
+            <a:srgbClr val="EEF2FB"/>
+          </a:solidFill>
+          <a:ln/>
+        </p:spPr>
+      </p:sp>
+      <p:sp>
+        <p:nvSpPr>
+          <p:cNvPr id="15" name="Text 13"/>
+          <p:cNvSpPr txBox="1"/>
+          <p:nvPr/>
+        </p:nvSpPr>
+        <p:spPr>
+          <a:xfrm>
+            <a:off x="777240" y="3163824"/>
+            <a:ext cx="438912" cy="438912"/>
+          </a:xfrm>
+          <a:prstGeom prst="rect">
+            <a:avLst/>
+          </a:prstGeom>
+          <a:noFill/>
+          <a:ln/>
+        </p:spPr>
+        <p:txBody>
+          <a:bodyPr wrap="square" lIns="0" tIns="0" rIns="0" bIns="0" rtlCol="0" anchor="ctr"/>
+          <a:lstStyle/>
+          <a:p>
+            <a:pPr algn="ctr" indent="0" marL="0">
+              <a:buNone/>
+            </a:pPr>
+            <a:r>
+              <a:rPr lang="en-US" sz="1300" b="1" dirty="0">
+                <a:solidFill>
+                  <a:srgbClr val="2D63FF"/>
+                </a:solidFill>
+                <a:latin typeface="IBM Plex Mono" pitchFamily="34" charset="0"/>
+                <a:ea typeface="IBM Plex Mono" pitchFamily="34" charset="-122"/>
+                <a:cs typeface="IBM Plex Mono" pitchFamily="34" charset="-120"/>
+              </a:rPr>
+              <a:t>B</a:t>
+            </a:r>
+            <a:endParaRPr lang="en-US" sz="1300" dirty="0"/>
+          </a:p>
+        </p:txBody>
+      </p:sp>
+      <p:sp>
+        <p:nvSpPr>
+          <p:cNvPr id="16" name="Text 14"/>
+          <p:cNvSpPr txBox="1"/>
+          <p:nvPr/>
+        </p:nvSpPr>
+        <p:spPr>
+          <a:xfrm>
+            <a:off x="1417320" y="3017520"/>
+            <a:ext cx="10058400" cy="731520"/>
           </a:xfrm>
           <a:prstGeom prst="rect">
             <a:avLst/>
@@ -3132,20 +3418,283 @@
           <a:lstStyle/>
           <a:p>
             <a:pPr indent="0" marL="0">
-              <a:buNone/>
-            </a:pPr>
-            <a:r>
-              <a:rPr lang="en-US" sz="1600" dirty="0">
-                <a:solidFill>
-                  <a:srgbClr val="667085"/>
+              <a:lnSpc>
+                <a:spcPct val="115000"/>
+              </a:lnSpc>
+              <a:buNone/>
+            </a:pPr>
+            <a:r>
+              <a:rPr lang="en-US" sz="1700" dirty="0">
+                <a:solidFill>
+                  <a:srgbClr val="101828"/>
                 </a:solidFill>
                 <a:latin typeface="IBM Plex Sans" pitchFamily="34" charset="0"/>
                 <a:ea typeface="IBM Plex Sans" pitchFamily="34" charset="-122"/>
                 <a:cs typeface="IBM Plex Sans" pitchFamily="34" charset="-120"/>
               </a:rPr>
-              <a:t>Predict on paper first, then look down and test it.</a:t>
-            </a:r>
-            <a:endParaRPr lang="en-US" sz="1600" dirty="0"/>
+              <a:t>A function returns a value to the code that called it, and a procedure does not</a:t>
+            </a:r>
+            <a:endParaRPr lang="en-US" sz="1700" dirty="0"/>
+          </a:p>
+        </p:txBody>
+      </p:sp>
+      <p:sp>
+        <p:nvSpPr>
+          <p:cNvPr id="17" name="Shape 15"/>
+          <p:cNvSpPr/>
+          <p:nvPr/>
+        </p:nvSpPr>
+        <p:spPr>
+          <a:xfrm>
+            <a:off x="502920" y="3886200"/>
+            <a:ext cx="11155680" cy="731520"/>
+          </a:xfrm>
+          <a:prstGeom prst="roundRect">
+            <a:avLst>
+              <a:gd name="adj" fmla="val 15000"/>
+            </a:avLst>
+          </a:prstGeom>
+          <a:solidFill>
+            <a:srgbClr val="FFFFFF"/>
+          </a:solidFill>
+          <a:ln w="15875">
+            <a:solidFill>
+              <a:srgbClr val="D9DEE7"/>
+            </a:solidFill>
+            <a:prstDash val="solid"/>
+          </a:ln>
+        </p:spPr>
+      </p:sp>
+      <p:sp>
+        <p:nvSpPr>
+          <p:cNvPr id="18" name="Shape 16"/>
+          <p:cNvSpPr/>
+          <p:nvPr/>
+        </p:nvSpPr>
+        <p:spPr>
+          <a:xfrm>
+            <a:off x="777240" y="4032504"/>
+            <a:ext cx="438912" cy="438912"/>
+          </a:xfrm>
+          <a:prstGeom prst="roundRect">
+            <a:avLst>
+              <a:gd name="adj" fmla="val 20833"/>
+            </a:avLst>
+          </a:prstGeom>
+          <a:solidFill>
+            <a:srgbClr val="EEF2FB"/>
+          </a:solidFill>
+          <a:ln/>
+        </p:spPr>
+      </p:sp>
+      <p:sp>
+        <p:nvSpPr>
+          <p:cNvPr id="19" name="Text 17"/>
+          <p:cNvSpPr txBox="1"/>
+          <p:nvPr/>
+        </p:nvSpPr>
+        <p:spPr>
+          <a:xfrm>
+            <a:off x="777240" y="4032504"/>
+            <a:ext cx="438912" cy="438912"/>
+          </a:xfrm>
+          <a:prstGeom prst="rect">
+            <a:avLst/>
+          </a:prstGeom>
+          <a:noFill/>
+          <a:ln/>
+        </p:spPr>
+        <p:txBody>
+          <a:bodyPr wrap="square" lIns="0" tIns="0" rIns="0" bIns="0" rtlCol="0" anchor="ctr"/>
+          <a:lstStyle/>
+          <a:p>
+            <a:pPr algn="ctr" indent="0" marL="0">
+              <a:buNone/>
+            </a:pPr>
+            <a:r>
+              <a:rPr lang="en-US" sz="1300" b="1" dirty="0">
+                <a:solidFill>
+                  <a:srgbClr val="2D63FF"/>
+                </a:solidFill>
+                <a:latin typeface="IBM Plex Mono" pitchFamily="34" charset="0"/>
+                <a:ea typeface="IBM Plex Mono" pitchFamily="34" charset="-122"/>
+                <a:cs typeface="IBM Plex Mono" pitchFamily="34" charset="-120"/>
+              </a:rPr>
+              <a:t>C</a:t>
+            </a:r>
+            <a:endParaRPr lang="en-US" sz="1300" dirty="0"/>
+          </a:p>
+        </p:txBody>
+      </p:sp>
+      <p:sp>
+        <p:nvSpPr>
+          <p:cNvPr id="20" name="Text 18"/>
+          <p:cNvSpPr txBox="1"/>
+          <p:nvPr/>
+        </p:nvSpPr>
+        <p:spPr>
+          <a:xfrm>
+            <a:off x="1417320" y="3886200"/>
+            <a:ext cx="10058400" cy="731520"/>
+          </a:xfrm>
+          <a:prstGeom prst="rect">
+            <a:avLst/>
+          </a:prstGeom>
+          <a:noFill/>
+          <a:ln/>
+        </p:spPr>
+        <p:txBody>
+          <a:bodyPr wrap="square" lIns="0" tIns="0" rIns="0" bIns="0" rtlCol="0" anchor="ctr"/>
+          <a:lstStyle/>
+          <a:p>
+            <a:pPr indent="0" marL="0">
+              <a:lnSpc>
+                <a:spcPct val="115000"/>
+              </a:lnSpc>
+              <a:buNone/>
+            </a:pPr>
+            <a:r>
+              <a:rPr lang="en-US" sz="1700" dirty="0">
+                <a:solidFill>
+                  <a:srgbClr val="101828"/>
+                </a:solidFill>
+                <a:latin typeface="IBM Plex Sans" pitchFamily="34" charset="0"/>
+                <a:ea typeface="IBM Plex Sans" pitchFamily="34" charset="-122"/>
+                <a:cs typeface="IBM Plex Sans" pitchFamily="34" charset="-120"/>
+              </a:rPr>
+              <a:t>A procedure may be called many times, and a function only once</a:t>
+            </a:r>
+            <a:endParaRPr lang="en-US" sz="1700" dirty="0"/>
+          </a:p>
+        </p:txBody>
+      </p:sp>
+      <p:sp>
+        <p:nvSpPr>
+          <p:cNvPr id="21" name="Shape 19"/>
+          <p:cNvSpPr/>
+          <p:nvPr/>
+        </p:nvSpPr>
+        <p:spPr>
+          <a:xfrm>
+            <a:off x="502920" y="4754880"/>
+            <a:ext cx="11155680" cy="731520"/>
+          </a:xfrm>
+          <a:prstGeom prst="roundRect">
+            <a:avLst>
+              <a:gd name="adj" fmla="val 15000"/>
+            </a:avLst>
+          </a:prstGeom>
+          <a:solidFill>
+            <a:srgbClr val="FFFFFF"/>
+          </a:solidFill>
+          <a:ln w="15875">
+            <a:solidFill>
+              <a:srgbClr val="D9DEE7"/>
+            </a:solidFill>
+            <a:prstDash val="solid"/>
+          </a:ln>
+        </p:spPr>
+      </p:sp>
+      <p:sp>
+        <p:nvSpPr>
+          <p:cNvPr id="22" name="Shape 20"/>
+          <p:cNvSpPr/>
+          <p:nvPr/>
+        </p:nvSpPr>
+        <p:spPr>
+          <a:xfrm>
+            <a:off x="777240" y="4901184"/>
+            <a:ext cx="438912" cy="438912"/>
+          </a:xfrm>
+          <a:prstGeom prst="roundRect">
+            <a:avLst>
+              <a:gd name="adj" fmla="val 20833"/>
+            </a:avLst>
+          </a:prstGeom>
+          <a:solidFill>
+            <a:srgbClr val="EEF2FB"/>
+          </a:solidFill>
+          <a:ln/>
+        </p:spPr>
+      </p:sp>
+      <p:sp>
+        <p:nvSpPr>
+          <p:cNvPr id="23" name="Text 21"/>
+          <p:cNvSpPr txBox="1"/>
+          <p:nvPr/>
+        </p:nvSpPr>
+        <p:spPr>
+          <a:xfrm>
+            <a:off x="777240" y="4901184"/>
+            <a:ext cx="438912" cy="438912"/>
+          </a:xfrm>
+          <a:prstGeom prst="rect">
+            <a:avLst/>
+          </a:prstGeom>
+          <a:noFill/>
+          <a:ln/>
+        </p:spPr>
+        <p:txBody>
+          <a:bodyPr wrap="square" lIns="0" tIns="0" rIns="0" bIns="0" rtlCol="0" anchor="ctr"/>
+          <a:lstStyle/>
+          <a:p>
+            <a:pPr algn="ctr" indent="0" marL="0">
+              <a:buNone/>
+            </a:pPr>
+            <a:r>
+              <a:rPr lang="en-US" sz="1300" b="1" dirty="0">
+                <a:solidFill>
+                  <a:srgbClr val="2D63FF"/>
+                </a:solidFill>
+                <a:latin typeface="IBM Plex Mono" pitchFamily="34" charset="0"/>
+                <a:ea typeface="IBM Plex Mono" pitchFamily="34" charset="-122"/>
+                <a:cs typeface="IBM Plex Mono" pitchFamily="34" charset="-120"/>
+              </a:rPr>
+              <a:t>D</a:t>
+            </a:r>
+            <a:endParaRPr lang="en-US" sz="1300" dirty="0"/>
+          </a:p>
+        </p:txBody>
+      </p:sp>
+      <p:sp>
+        <p:nvSpPr>
+          <p:cNvPr id="24" name="Text 22"/>
+          <p:cNvSpPr txBox="1"/>
+          <p:nvPr/>
+        </p:nvSpPr>
+        <p:spPr>
+          <a:xfrm>
+            <a:off x="1417320" y="4754880"/>
+            <a:ext cx="10058400" cy="731520"/>
+          </a:xfrm>
+          <a:prstGeom prst="rect">
+            <a:avLst/>
+          </a:prstGeom>
+          <a:noFill/>
+          <a:ln/>
+        </p:spPr>
+        <p:txBody>
+          <a:bodyPr wrap="square" lIns="0" tIns="0" rIns="0" bIns="0" rtlCol="0" anchor="ctr"/>
+          <a:lstStyle/>
+          <a:p>
+            <a:pPr indent="0" marL="0">
+              <a:lnSpc>
+                <a:spcPct val="115000"/>
+              </a:lnSpc>
+              <a:buNone/>
+            </a:pPr>
+            <a:r>
+              <a:rPr lang="en-US" sz="1700" dirty="0">
+                <a:solidFill>
+                  <a:srgbClr val="101828"/>
+                </a:solidFill>
+                <a:latin typeface="IBM Plex Sans" pitchFamily="34" charset="0"/>
+                <a:ea typeface="IBM Plex Sans" pitchFamily="34" charset="-122"/>
+                <a:cs typeface="IBM Plex Sans" pitchFamily="34" charset="-120"/>
+              </a:rPr>
+              <a:t>A function must be written inside a loop, and a procedure must not</a:t>
+            </a:r>
+            <a:endParaRPr lang="en-US" sz="1700" dirty="0"/>
           </a:p>
         </p:txBody>
       </p:sp>
@@ -3281,14 +3830,75 @@
       </p:sp>
       <p:sp>
         <p:nvSpPr>
-          <p:cNvPr id="5" name="Text 3"/>
-          <p:cNvSpPr txBox="1"/>
-          <p:nvPr/>
-        </p:nvSpPr>
-        <p:spPr>
-          <a:xfrm>
-            <a:off x="502920" y="411480"/>
-            <a:ext cx="11155680" cy="777240"/>
+          <p:cNvPr id="5" name="Shape 3"/>
+          <p:cNvSpPr/>
+          <p:nvPr/>
+        </p:nvSpPr>
+        <p:spPr>
+          <a:xfrm>
+            <a:off x="502920" y="438912"/>
+            <a:ext cx="3108960" cy="502920"/>
+          </a:xfrm>
+          <a:prstGeom prst="roundRect">
+            <a:avLst>
+              <a:gd name="adj" fmla="val 18182"/>
+            </a:avLst>
+          </a:prstGeom>
+          <a:solidFill>
+            <a:srgbClr val="F4B942"/>
+          </a:solidFill>
+          <a:ln/>
+        </p:spPr>
+      </p:sp>
+      <p:sp>
+        <p:nvSpPr>
+          <p:cNvPr id="6" name="Text 4"/>
+          <p:cNvSpPr txBox="1"/>
+          <p:nvPr/>
+        </p:nvSpPr>
+        <p:spPr>
+          <a:xfrm>
+            <a:off x="502920" y="438912"/>
+            <a:ext cx="3108960" cy="502920"/>
+          </a:xfrm>
+          <a:prstGeom prst="rect">
+            <a:avLst/>
+          </a:prstGeom>
+          <a:noFill/>
+          <a:ln/>
+        </p:spPr>
+        <p:txBody>
+          <a:bodyPr wrap="square" lIns="0" tIns="0" rIns="0" bIns="0" rtlCol="0" anchor="ctr"/>
+          <a:lstStyle/>
+          <a:p>
+            <a:pPr algn="ctr" indent="0" marL="0">
+              <a:buNone/>
+            </a:pPr>
+            <a:r>
+              <a:rPr lang="en-US" sz="1300" b="1" dirty="0">
+                <a:solidFill>
+                  <a:srgbClr val="101828"/>
+                </a:solidFill>
+                <a:latin typeface="IBM Plex Mono" pitchFamily="34" charset="0"/>
+                <a:ea typeface="IBM Plex Mono" pitchFamily="34" charset="-122"/>
+                <a:cs typeface="IBM Plex Mono" pitchFamily="34" charset="-120"/>
+              </a:rPr>
+              <a:t>★  FINAL CHALLENGE</a:t>
+            </a:r>
+            <a:endParaRPr lang="en-US" sz="1300" dirty="0"/>
+          </a:p>
+        </p:txBody>
+      </p:sp>
+      <p:sp>
+        <p:nvSpPr>
+          <p:cNvPr id="7" name="Text 5"/>
+          <p:cNvSpPr txBox="1"/>
+          <p:nvPr/>
+        </p:nvSpPr>
+        <p:spPr>
+          <a:xfrm>
+            <a:off x="502920" y="1097280"/>
+            <a:ext cx="11155680" cy="731520"/>
           </a:xfrm>
           <a:prstGeom prst="rect">
             <a:avLst/>
@@ -3304,7 +3914,7 @@
               <a:buNone/>
             </a:pPr>
             <a:r>
-              <a:rPr lang="en-US" sz="3200" b="1" dirty="0">
+              <a:rPr lang="en-US" sz="3400" b="1" dirty="0">
                 <a:solidFill>
                   <a:srgbClr val="101828"/>
                 </a:solidFill>
@@ -3312,65 +3922,26 @@
                 <a:ea typeface="IBM Plex Sans" pitchFamily="34" charset="-122"/>
                 <a:cs typeface="IBM Plex Sans" pitchFamily="34" charset="-120"/>
               </a:rPr>
-              <a:t>Worth knowing</a:t>
-            </a:r>
-            <a:endParaRPr lang="en-US" sz="3200" dirty="0"/>
-          </a:p>
-        </p:txBody>
-      </p:sp>
-      <p:sp>
-        <p:nvSpPr>
-          <p:cNvPr id="6" name="Text 4"/>
-          <p:cNvSpPr txBox="1"/>
-          <p:nvPr/>
-        </p:nvSpPr>
-        <p:spPr>
-          <a:xfrm>
-            <a:off x="502920" y="1170432"/>
-            <a:ext cx="11155680" cy="411480"/>
-          </a:xfrm>
-          <a:prstGeom prst="rect">
-            <a:avLst/>
-          </a:prstGeom>
-          <a:noFill/>
-          <a:ln/>
-        </p:spPr>
-        <p:txBody>
-          <a:bodyPr wrap="square" lIns="0" tIns="0" rIns="0" bIns="0" rtlCol="0" anchor="ctr"/>
-          <a:lstStyle/>
-          <a:p>
-            <a:pPr indent="0" marL="0">
-              <a:buNone/>
-            </a:pPr>
-            <a:r>
-              <a:rPr lang="en-US" sz="1500" dirty="0">
-                <a:solidFill>
-                  <a:srgbClr val="667085"/>
-                </a:solidFill>
-                <a:latin typeface="IBM Plex Sans" pitchFamily="34" charset="0"/>
-                <a:ea typeface="IBM Plex Sans" pitchFamily="34" charset="-122"/>
-                <a:cs typeface="IBM Plex Sans" pitchFamily="34" charset="-120"/>
-              </a:rPr>
-              <a:t>The information markers dotted around the room</a:t>
-            </a:r>
-            <a:endParaRPr lang="en-US" sz="1500" dirty="0"/>
-          </a:p>
-        </p:txBody>
-      </p:sp>
-      <p:sp>
-        <p:nvSpPr>
-          <p:cNvPr id="7" name="Shape 5"/>
+              <a:t>Total the crates</a:t>
+            </a:r>
+            <a:endParaRPr lang="en-US" sz="3400" dirty="0"/>
+          </a:p>
+        </p:txBody>
+      </p:sp>
+      <p:sp>
+        <p:nvSpPr>
+          <p:cNvPr id="8" name="Shape 6"/>
           <p:cNvSpPr/>
           <p:nvPr/>
         </p:nvSpPr>
         <p:spPr>
           <a:xfrm>
-            <a:off x="502920" y="1828800"/>
-            <a:ext cx="5394960" cy="1737360"/>
+            <a:off x="502920" y="2011680"/>
+            <a:ext cx="11155680" cy="2194560"/>
           </a:xfrm>
           <a:prstGeom prst="roundRect">
             <a:avLst>
-              <a:gd name="adj" fmla="val 6316"/>
+              <a:gd name="adj" fmla="val 5000"/>
             </a:avLst>
           </a:prstGeom>
           <a:solidFill>
@@ -3386,14 +3957,14 @@
       </p:sp>
       <p:sp>
         <p:nvSpPr>
-          <p:cNvPr id="8" name="Text 6"/>
-          <p:cNvSpPr txBox="1"/>
-          <p:nvPr/>
-        </p:nvSpPr>
-        <p:spPr>
-          <a:xfrm>
-            <a:off x="822960" y="2011680"/>
-            <a:ext cx="4754880" cy="365760"/>
+          <p:cNvPr id="9" name="Text 7"/>
+          <p:cNvSpPr txBox="1"/>
+          <p:nvPr/>
+        </p:nvSpPr>
+        <p:spPr>
+          <a:xfrm>
+            <a:off x="1005840" y="2331720"/>
+            <a:ext cx="10149840" cy="1554480"/>
           </a:xfrm>
           <a:prstGeom prst="rect">
             <a:avLst/>
@@ -3406,52 +3977,52 @@
           <a:lstStyle/>
           <a:p>
             <a:pPr indent="0" marL="0">
-              <a:buNone/>
-            </a:pPr>
-            <a:r>
-              <a:rPr lang="en-US" sz="1600" b="1" dirty="0">
-                <a:solidFill>
-                  <a:srgbClr val="2D63FF"/>
+              <a:lnSpc>
+                <a:spcPct val="130000"/>
+              </a:lnSpc>
+              <a:buNone/>
+            </a:pPr>
+            <a:r>
+              <a:rPr lang="en-US" sz="2200" dirty="0">
+                <a:solidFill>
+                  <a:srgbClr val="101828"/>
                 </a:solidFill>
                 <a:latin typeface="IBM Plex Sans" pitchFamily="34" charset="0"/>
                 <a:ea typeface="IBM Plex Sans" pitchFamily="34" charset="-122"/>
                 <a:cs typeface="IBM Plex Sans" pitchFamily="34" charset="-120"/>
               </a:rPr>
-              <a:t>Same type throughout</a:t>
-            </a:r>
-            <a:endParaRPr lang="en-US" sz="1600" dirty="0"/>
-          </a:p>
-        </p:txBody>
-      </p:sp>
-      <p:sp>
-        <p:nvSpPr>
-          <p:cNvPr id="9" name="Text 7"/>
-          <p:cNvSpPr txBox="1"/>
-          <p:nvPr/>
-        </p:nvSpPr>
-        <p:spPr>
-          <a:xfrm>
-            <a:off x="822960" y="2395728"/>
-            <a:ext cx="4754880" cy="1005840"/>
-          </a:xfrm>
-          <a:prstGeom prst="rect">
-            <a:avLst/>
-          </a:prstGeom>
-          <a:noFill/>
-          <a:ln/>
-        </p:spPr>
-        <p:txBody>
-          <a:bodyPr wrap="square" lIns="0" tIns="0" rIns="0" bIns="0" rtlCol="0" anchor="t"/>
+              <a:t>Six lines of the OCR Exam Reference Language, jumbled. Tap the star and put them into a working program that adds up all five crate weights and outputs the total.</a:t>
+            </a:r>
+            <a:endParaRPr lang="en-US" sz="2200" dirty="0"/>
+          </a:p>
+        </p:txBody>
+      </p:sp>
+      <p:sp>
+        <p:nvSpPr>
+          <p:cNvPr id="10" name="Text 8"/>
+          <p:cNvSpPr txBox="1"/>
+          <p:nvPr/>
+        </p:nvSpPr>
+        <p:spPr>
+          <a:xfrm>
+            <a:off x="502920" y="4526280"/>
+            <a:ext cx="11155680" cy="457200"/>
+          </a:xfrm>
+          <a:prstGeom prst="rect">
+            <a:avLst/>
+          </a:prstGeom>
+          <a:noFill/>
+          <a:ln/>
+        </p:spPr>
+        <p:txBody>
+          <a:bodyPr wrap="square" lIns="0" tIns="0" rIns="0" bIns="0" rtlCol="0" anchor="ctr"/>
           <a:lstStyle/>
           <a:p>
             <a:pPr indent="0" marL="0">
-              <a:lnSpc>
-                <a:spcPct val="120000"/>
-              </a:lnSpc>
-              <a:buNone/>
-            </a:pPr>
-            <a:r>
-              <a:rPr lang="en-US" sz="1300" dirty="0">
+              <a:buNone/>
+            </a:pPr>
+            <a:r>
+              <a:rPr lang="en-US" sz="1600" dirty="0">
                 <a:solidFill>
                   <a:srgbClr val="667085"/>
                 </a:solidFill>
@@ -3459,333 +4030,9 @@
                 <a:ea typeface="IBM Plex Sans" pitchFamily="34" charset="-122"/>
                 <a:cs typeface="IBM Plex Sans" pitchFamily="34" charset="-120"/>
               </a:rPr>
-              <a:t>An array holds values of one data type, which is how the computer knows exactly how much space each element needs and where each one begins. A record is the opposite: it is built to hold fields of different types.</a:t>
-            </a:r>
-            <a:endParaRPr lang="en-US" sz="1300" dirty="0"/>
-          </a:p>
-        </p:txBody>
-      </p:sp>
-      <p:sp>
-        <p:nvSpPr>
-          <p:cNvPr id="10" name="Shape 8"/>
-          <p:cNvSpPr/>
-          <p:nvPr/>
-        </p:nvSpPr>
-        <p:spPr>
-          <a:xfrm>
-            <a:off x="6217920" y="1828800"/>
-            <a:ext cx="5394960" cy="1737360"/>
-          </a:xfrm>
-          <a:prstGeom prst="roundRect">
-            <a:avLst>
-              <a:gd name="adj" fmla="val 6316"/>
-            </a:avLst>
-          </a:prstGeom>
-          <a:solidFill>
-            <a:srgbClr val="FFFFFF"/>
-          </a:solidFill>
-          <a:ln w="15875">
-            <a:solidFill>
-              <a:srgbClr val="08A6A6"/>
-            </a:solidFill>
-            <a:prstDash val="solid"/>
-          </a:ln>
-        </p:spPr>
-      </p:sp>
-      <p:sp>
-        <p:nvSpPr>
-          <p:cNvPr id="11" name="Text 9"/>
-          <p:cNvSpPr txBox="1"/>
-          <p:nvPr/>
-        </p:nvSpPr>
-        <p:spPr>
-          <a:xfrm>
-            <a:off x="6537960" y="2011680"/>
-            <a:ext cx="4754880" cy="365760"/>
-          </a:xfrm>
-          <a:prstGeom prst="rect">
-            <a:avLst/>
-          </a:prstGeom>
-          <a:noFill/>
-          <a:ln/>
-        </p:spPr>
-        <p:txBody>
-          <a:bodyPr wrap="square" lIns="0" tIns="0" rIns="0" bIns="0" rtlCol="0" anchor="ctr"/>
-          <a:lstStyle/>
-          <a:p>
-            <a:pPr indent="0" marL="0">
-              <a:buNone/>
-            </a:pPr>
-            <a:r>
-              <a:rPr lang="en-US" sz="1600" b="1" dirty="0">
-                <a:solidFill>
-                  <a:srgbClr val="08A6A6"/>
-                </a:solidFill>
-                <a:latin typeface="IBM Plex Sans" pitchFamily="34" charset="0"/>
-                <a:ea typeface="IBM Plex Sans" pitchFamily="34" charset="-122"/>
-                <a:cs typeface="IBM Plex Sans" pitchFamily="34" charset="-120"/>
-              </a:rPr>
-              <a:t>Why zero</a:t>
+              <a:t>Predict on paper first, then look down and test it.</a:t>
             </a:r>
             <a:endParaRPr lang="en-US" sz="1600" dirty="0"/>
-          </a:p>
-        </p:txBody>
-      </p:sp>
-      <p:sp>
-        <p:nvSpPr>
-          <p:cNvPr id="12" name="Text 10"/>
-          <p:cNvSpPr txBox="1"/>
-          <p:nvPr/>
-        </p:nvSpPr>
-        <p:spPr>
-          <a:xfrm>
-            <a:off x="6537960" y="2395728"/>
-            <a:ext cx="4754880" cy="1005840"/>
-          </a:xfrm>
-          <a:prstGeom prst="rect">
-            <a:avLst/>
-          </a:prstGeom>
-          <a:noFill/>
-          <a:ln/>
-        </p:spPr>
-        <p:txBody>
-          <a:bodyPr wrap="square" lIns="0" tIns="0" rIns="0" bIns="0" rtlCol="0" anchor="t"/>
-          <a:lstStyle/>
-          <a:p>
-            <a:pPr indent="0" marL="0">
-              <a:lnSpc>
-                <a:spcPct val="120000"/>
-              </a:lnSpc>
-              <a:buNone/>
-            </a:pPr>
-            <a:r>
-              <a:rPr lang="en-US" sz="1300" dirty="0">
-                <a:solidFill>
-                  <a:srgbClr val="667085"/>
-                </a:solidFill>
-                <a:latin typeface="IBM Plex Sans" pitchFamily="34" charset="0"/>
-                <a:ea typeface="IBM Plex Sans" pitchFamily="34" charset="-122"/>
-                <a:cs typeface="IBM Plex Sans" pitchFamily="34" charset="-120"/>
-              </a:rPr>
-              <a:t>The index is really how far an element sits from the start of the array, so the very first element is nothing at all from the start, which is zero. Reading one element is then a single calculation rather than a search.</a:t>
-            </a:r>
-            <a:endParaRPr lang="en-US" sz="1300" dirty="0"/>
-          </a:p>
-        </p:txBody>
-      </p:sp>
-      <p:sp>
-        <p:nvSpPr>
-          <p:cNvPr id="13" name="Shape 11"/>
-          <p:cNvSpPr/>
-          <p:nvPr/>
-        </p:nvSpPr>
-        <p:spPr>
-          <a:xfrm>
-            <a:off x="502920" y="3794760"/>
-            <a:ext cx="5394960" cy="1737360"/>
-          </a:xfrm>
-          <a:prstGeom prst="roundRect">
-            <a:avLst>
-              <a:gd name="adj" fmla="val 6316"/>
-            </a:avLst>
-          </a:prstGeom>
-          <a:solidFill>
-            <a:srgbClr val="FFFFFF"/>
-          </a:solidFill>
-          <a:ln w="15875">
-            <a:solidFill>
-              <a:srgbClr val="2D63FF"/>
-            </a:solidFill>
-            <a:prstDash val="solid"/>
-          </a:ln>
-        </p:spPr>
-      </p:sp>
-      <p:sp>
-        <p:nvSpPr>
-          <p:cNvPr id="14" name="Text 12"/>
-          <p:cNvSpPr txBox="1"/>
-          <p:nvPr/>
-        </p:nvSpPr>
-        <p:spPr>
-          <a:xfrm>
-            <a:off x="822960" y="3977640"/>
-            <a:ext cx="4754880" cy="365760"/>
-          </a:xfrm>
-          <a:prstGeom prst="rect">
-            <a:avLst/>
-          </a:prstGeom>
-          <a:noFill/>
-          <a:ln/>
-        </p:spPr>
-        <p:txBody>
-          <a:bodyPr wrap="square" lIns="0" tIns="0" rIns="0" bIns="0" rtlCol="0" anchor="ctr"/>
-          <a:lstStyle/>
-          <a:p>
-            <a:pPr indent="0" marL="0">
-              <a:buNone/>
-            </a:pPr>
-            <a:r>
-              <a:rPr lang="en-US" sz="1600" b="1" dirty="0">
-                <a:solidFill>
-                  <a:srgbClr val="2D63FF"/>
-                </a:solidFill>
-                <a:latin typeface="IBM Plex Sans" pitchFamily="34" charset="0"/>
-                <a:ea typeface="IBM Plex Sans" pitchFamily="34" charset="-122"/>
-                <a:cs typeface="IBM Plex Sans" pitchFamily="34" charset="-120"/>
-              </a:rPr>
-              <a:t>Rows then columns</a:t>
-            </a:r>
-            <a:endParaRPr lang="en-US" sz="1600" dirty="0"/>
-          </a:p>
-        </p:txBody>
-      </p:sp>
-      <p:sp>
-        <p:nvSpPr>
-          <p:cNvPr id="15" name="Text 13"/>
-          <p:cNvSpPr txBox="1"/>
-          <p:nvPr/>
-        </p:nvSpPr>
-        <p:spPr>
-          <a:xfrm>
-            <a:off x="822960" y="4361688"/>
-            <a:ext cx="4754880" cy="1005840"/>
-          </a:xfrm>
-          <a:prstGeom prst="rect">
-            <a:avLst/>
-          </a:prstGeom>
-          <a:noFill/>
-          <a:ln/>
-        </p:spPr>
-        <p:txBody>
-          <a:bodyPr wrap="square" lIns="0" tIns="0" rIns="0" bIns="0" rtlCol="0" anchor="t"/>
-          <a:lstStyle/>
-          <a:p>
-            <a:pPr indent="0" marL="0">
-              <a:lnSpc>
-                <a:spcPct val="120000"/>
-              </a:lnSpc>
-              <a:buNone/>
-            </a:pPr>
-            <a:r>
-              <a:rPr lang="en-US" sz="1300" dirty="0">
-                <a:solidFill>
-                  <a:srgbClr val="667085"/>
-                </a:solidFill>
-                <a:latin typeface="IBM Plex Sans" pitchFamily="34" charset="0"/>
-                <a:ea typeface="IBM Plex Sans" pitchFamily="34" charset="-122"/>
-                <a:cs typeface="IBM Plex Sans" pitchFamily="34" charset="-120"/>
-              </a:rPr>
-              <a:t>Almost every language writes a two-dimensional array as row first and column second. Getting those two the wrong way round in a nested loop is one of the most common bugs in Year 11 coursework.</a:t>
-            </a:r>
-            <a:endParaRPr lang="en-US" sz="1300" dirty="0"/>
-          </a:p>
-        </p:txBody>
-      </p:sp>
-      <p:sp>
-        <p:nvSpPr>
-          <p:cNvPr id="16" name="Shape 14"/>
-          <p:cNvSpPr/>
-          <p:nvPr/>
-        </p:nvSpPr>
-        <p:spPr>
-          <a:xfrm>
-            <a:off x="6217920" y="3794760"/>
-            <a:ext cx="5394960" cy="1737360"/>
-          </a:xfrm>
-          <a:prstGeom prst="roundRect">
-            <a:avLst>
-              <a:gd name="adj" fmla="val 6316"/>
-            </a:avLst>
-          </a:prstGeom>
-          <a:solidFill>
-            <a:srgbClr val="FFFFFF"/>
-          </a:solidFill>
-          <a:ln w="15875">
-            <a:solidFill>
-              <a:srgbClr val="08A6A6"/>
-            </a:solidFill>
-            <a:prstDash val="solid"/>
-          </a:ln>
-        </p:spPr>
-      </p:sp>
-      <p:sp>
-        <p:nvSpPr>
-          <p:cNvPr id="17" name="Text 15"/>
-          <p:cNvSpPr txBox="1"/>
-          <p:nvPr/>
-        </p:nvSpPr>
-        <p:spPr>
-          <a:xfrm>
-            <a:off x="6537960" y="3977640"/>
-            <a:ext cx="4754880" cy="365760"/>
-          </a:xfrm>
-          <a:prstGeom prst="rect">
-            <a:avLst/>
-          </a:prstGeom>
-          <a:noFill/>
-          <a:ln/>
-        </p:spPr>
-        <p:txBody>
-          <a:bodyPr wrap="square" lIns="0" tIns="0" rIns="0" bIns="0" rtlCol="0" anchor="ctr"/>
-          <a:lstStyle/>
-          <a:p>
-            <a:pPr indent="0" marL="0">
-              <a:buNone/>
-            </a:pPr>
-            <a:r>
-              <a:rPr lang="en-US" sz="1600" b="1" dirty="0">
-                <a:solidFill>
-                  <a:srgbClr val="08A6A6"/>
-                </a:solidFill>
-                <a:latin typeface="IBM Plex Sans" pitchFamily="34" charset="0"/>
-                <a:ea typeface="IBM Plex Sans" pitchFamily="34" charset="-122"/>
-                <a:cs typeface="IBM Plex Sans" pitchFamily="34" charset="-120"/>
-              </a:rPr>
-              <a:t>Why bother</a:t>
-            </a:r>
-            <a:endParaRPr lang="en-US" sz="1600" dirty="0"/>
-          </a:p>
-        </p:txBody>
-      </p:sp>
-      <p:sp>
-        <p:nvSpPr>
-          <p:cNvPr id="18" name="Text 16"/>
-          <p:cNvSpPr txBox="1"/>
-          <p:nvPr/>
-        </p:nvSpPr>
-        <p:spPr>
-          <a:xfrm>
-            <a:off x="6537960" y="4361688"/>
-            <a:ext cx="4754880" cy="1005840"/>
-          </a:xfrm>
-          <a:prstGeom prst="rect">
-            <a:avLst/>
-          </a:prstGeom>
-          <a:noFill/>
-          <a:ln/>
-        </p:spPr>
-        <p:txBody>
-          <a:bodyPr wrap="square" lIns="0" tIns="0" rIns="0" bIns="0" rtlCol="0" anchor="t"/>
-          <a:lstStyle/>
-          <a:p>
-            <a:pPr indent="0" marL="0">
-              <a:lnSpc>
-                <a:spcPct val="120000"/>
-              </a:lnSpc>
-              <a:buNone/>
-            </a:pPr>
-            <a:r>
-              <a:rPr lang="en-US" sz="1300" dirty="0">
-                <a:solidFill>
-                  <a:srgbClr val="667085"/>
-                </a:solidFill>
-                <a:latin typeface="IBM Plex Sans" pitchFamily="34" charset="0"/>
-                <a:ea typeface="IBM Plex Sans" pitchFamily="34" charset="-122"/>
-                <a:cs typeface="IBM Plex Sans" pitchFamily="34" charset="-120"/>
-              </a:rPr>
-              <a:t>Sub-programs are how a large program stays understandable. Each one can be written, tested and fixed on its own, and a sub-program written once can be reused in a completely different program.</a:t>
-            </a:r>
-            <a:endParaRPr lang="en-US" sz="1300" dirty="0"/>
           </a:p>
         </p:txBody>
       </p:sp>
@@ -3952,7 +4199,7 @@
                 <a:ea typeface="IBM Plex Sans" pitchFamily="34" charset="-122"/>
                 <a:cs typeface="IBM Plex Sans" pitchFamily="34" charset="-120"/>
               </a:rPr>
-              <a:t>Exam practice</a:t>
+              <a:t>Worth knowing</a:t>
             </a:r>
             <a:endParaRPr lang="en-US" sz="3200" dirty="0"/>
           </a:p>
@@ -3991,7 +4238,7 @@
                 <a:ea typeface="IBM Plex Sans" pitchFamily="34" charset="-122"/>
                 <a:cs typeface="IBM Plex Sans" pitchFamily="34" charset="-120"/>
               </a:rPr>
-              <a:t>Devices away. Answer from memory on the worksheet.</a:t>
+              <a:t>The information markers dotted around the room</a:t>
             </a:r>
             <a:endParaRPr lang="en-US" sz="1500" dirty="0"/>
           </a:p>
@@ -4006,11 +4253,11 @@
         <p:spPr>
           <a:xfrm>
             <a:off x="502920" y="1828800"/>
-            <a:ext cx="11155680" cy="1097280"/>
+            <a:ext cx="5394960" cy="1737360"/>
           </a:xfrm>
           <a:prstGeom prst="roundRect">
             <a:avLst>
-              <a:gd name="adj" fmla="val 10000"/>
+              <a:gd name="adj" fmla="val 6316"/>
             </a:avLst>
           </a:prstGeom>
           <a:solidFill>
@@ -4018,7 +4265,7 @@
           </a:solidFill>
           <a:ln w="15875">
             <a:solidFill>
-              <a:srgbClr val="D9DEE7"/>
+              <a:srgbClr val="2D63FF"/>
             </a:solidFill>
             <a:prstDash val="solid"/>
           </a:ln>
@@ -4032,8 +4279,8 @@
         </p:nvSpPr>
         <p:spPr>
           <a:xfrm>
-            <a:off x="914400" y="1938528"/>
-            <a:ext cx="9418320" cy="877824"/>
+            <a:off x="822960" y="2011680"/>
+            <a:ext cx="4754880" cy="365760"/>
           </a:xfrm>
           <a:prstGeom prst="rect">
             <a:avLst/>
@@ -4046,101 +4293,79 @@
           <a:lstStyle/>
           <a:p>
             <a:pPr indent="0" marL="0">
-              <a:lnSpc>
-                <a:spcPct val="118000"/>
-              </a:lnSpc>
-              <a:buNone/>
-            </a:pPr>
-            <a:r>
-              <a:rPr lang="en-US" sz="1700" dirty="0">
-                <a:solidFill>
-                  <a:srgbClr val="101828"/>
+              <a:buNone/>
+            </a:pPr>
+            <a:r>
+              <a:rPr lang="en-US" sz="1600" b="1" dirty="0">
+                <a:solidFill>
+                  <a:srgbClr val="2D63FF"/>
                 </a:solidFill>
                 <a:latin typeface="IBM Plex Sans" pitchFamily="34" charset="0"/>
                 <a:ea typeface="IBM Plex Sans" pitchFamily="34" charset="-122"/>
                 <a:cs typeface="IBM Plex Sans" pitchFamily="34" charset="-120"/>
               </a:rPr>
-              <a:t>An array is declared as  array scores[6].  State the index of the first element and the index of the last element.</a:t>
-            </a:r>
-            <a:endParaRPr lang="en-US" sz="1700" dirty="0"/>
-          </a:p>
-        </p:txBody>
-      </p:sp>
-      <p:sp>
-        <p:nvSpPr>
-          <p:cNvPr id="9" name="Shape 7"/>
+              <a:t>Same type throughout</a:t>
+            </a:r>
+            <a:endParaRPr lang="en-US" sz="1600" dirty="0"/>
+          </a:p>
+        </p:txBody>
+      </p:sp>
+      <p:sp>
+        <p:nvSpPr>
+          <p:cNvPr id="9" name="Text 7"/>
+          <p:cNvSpPr txBox="1"/>
+          <p:nvPr/>
+        </p:nvSpPr>
+        <p:spPr>
+          <a:xfrm>
+            <a:off x="822960" y="2395728"/>
+            <a:ext cx="4754880" cy="1005840"/>
+          </a:xfrm>
+          <a:prstGeom prst="rect">
+            <a:avLst/>
+          </a:prstGeom>
+          <a:noFill/>
+          <a:ln/>
+        </p:spPr>
+        <p:txBody>
+          <a:bodyPr wrap="square" lIns="0" tIns="0" rIns="0" bIns="0" rtlCol="0" anchor="t"/>
+          <a:lstStyle/>
+          <a:p>
+            <a:pPr indent="0" marL="0">
+              <a:lnSpc>
+                <a:spcPct val="120000"/>
+              </a:lnSpc>
+              <a:buNone/>
+            </a:pPr>
+            <a:r>
+              <a:rPr lang="en-US" sz="1300" dirty="0">
+                <a:solidFill>
+                  <a:srgbClr val="667085"/>
+                </a:solidFill>
+                <a:latin typeface="IBM Plex Sans" pitchFamily="34" charset="0"/>
+                <a:ea typeface="IBM Plex Sans" pitchFamily="34" charset="-122"/>
+                <a:cs typeface="IBM Plex Sans" pitchFamily="34" charset="-120"/>
+              </a:rPr>
+              <a:t>An array holds values of one data type, which is how the computer knows exactly how much space each element needs and where each one begins. A record is the opposite: it is built to hold fields of different types.</a:t>
+            </a:r>
+            <a:endParaRPr lang="en-US" sz="1300" dirty="0"/>
+          </a:p>
+        </p:txBody>
+      </p:sp>
+      <p:sp>
+        <p:nvSpPr>
+          <p:cNvPr id="10" name="Shape 8"/>
           <p:cNvSpPr/>
           <p:nvPr/>
         </p:nvSpPr>
         <p:spPr>
           <a:xfrm>
-            <a:off x="10515600" y="2130552"/>
-            <a:ext cx="868680" cy="493776"/>
+            <a:off x="6217920" y="1828800"/>
+            <a:ext cx="5394960" cy="1737360"/>
           </a:xfrm>
           <a:prstGeom prst="roundRect">
             <a:avLst>
-              <a:gd name="adj" fmla="val 18519"/>
-            </a:avLst>
-          </a:prstGeom>
-          <a:solidFill>
-            <a:srgbClr val="EEF2FB"/>
-          </a:solidFill>
-          <a:ln/>
-        </p:spPr>
-      </p:sp>
-      <p:sp>
-        <p:nvSpPr>
-          <p:cNvPr id="10" name="Text 8"/>
-          <p:cNvSpPr txBox="1"/>
-          <p:nvPr/>
-        </p:nvSpPr>
-        <p:spPr>
-          <a:xfrm>
-            <a:off x="10515600" y="2130552"/>
-            <a:ext cx="868680" cy="493776"/>
-          </a:xfrm>
-          <a:prstGeom prst="rect">
-            <a:avLst/>
-          </a:prstGeom>
-          <a:noFill/>
-          <a:ln/>
-        </p:spPr>
-        <p:txBody>
-          <a:bodyPr wrap="square" lIns="0" tIns="0" rIns="0" bIns="0" rtlCol="0" anchor="ctr"/>
-          <a:lstStyle/>
-          <a:p>
-            <a:pPr algn="ctr" indent="0" marL="0">
-              <a:buNone/>
-            </a:pPr>
-            <a:r>
-              <a:rPr lang="en-US" sz="1500" b="1" dirty="0">
-                <a:solidFill>
-                  <a:srgbClr val="2D63FF"/>
-                </a:solidFill>
-                <a:latin typeface="IBM Plex Mono" pitchFamily="34" charset="0"/>
-                <a:ea typeface="IBM Plex Mono" pitchFamily="34" charset="-122"/>
-                <a:cs typeface="IBM Plex Mono" pitchFamily="34" charset="-120"/>
-              </a:rPr>
-              <a:t>[2]</a:t>
-            </a:r>
-            <a:endParaRPr lang="en-US" sz="1500" dirty="0"/>
-          </a:p>
-        </p:txBody>
-      </p:sp>
-      <p:sp>
-        <p:nvSpPr>
-          <p:cNvPr id="11" name="Shape 9"/>
-          <p:cNvSpPr/>
-          <p:nvPr/>
-        </p:nvSpPr>
-        <p:spPr>
-          <a:xfrm>
-            <a:off x="502920" y="3127248"/>
-            <a:ext cx="11155680" cy="1097280"/>
-          </a:xfrm>
-          <a:prstGeom prst="roundRect">
-            <a:avLst>
-              <a:gd name="adj" fmla="val 10000"/>
+              <a:gd name="adj" fmla="val 6316"/>
             </a:avLst>
           </a:prstGeom>
           <a:solidFill>
@@ -4148,7 +4373,7 @@
           </a:solidFill>
           <a:ln w="15875">
             <a:solidFill>
-              <a:srgbClr val="D9DEE7"/>
+              <a:srgbClr val="08A6A6"/>
             </a:solidFill>
             <a:prstDash val="solid"/>
           </a:ln>
@@ -4156,14 +4381,14 @@
       </p:sp>
       <p:sp>
         <p:nvSpPr>
-          <p:cNvPr id="12" name="Text 10"/>
-          <p:cNvSpPr txBox="1"/>
-          <p:nvPr/>
-        </p:nvSpPr>
-        <p:spPr>
-          <a:xfrm>
-            <a:off x="914400" y="3236976"/>
-            <a:ext cx="9418320" cy="877824"/>
+          <p:cNvPr id="11" name="Text 9"/>
+          <p:cNvSpPr txBox="1"/>
+          <p:nvPr/>
+        </p:nvSpPr>
+        <p:spPr>
+          <a:xfrm>
+            <a:off x="6537960" y="2011680"/>
+            <a:ext cx="4754880" cy="365760"/>
           </a:xfrm>
           <a:prstGeom prst="rect">
             <a:avLst/>
@@ -4176,23 +4401,62 @@
           <a:lstStyle/>
           <a:p>
             <a:pPr indent="0" marL="0">
-              <a:lnSpc>
-                <a:spcPct val="118000"/>
-              </a:lnSpc>
-              <a:buNone/>
-            </a:pPr>
-            <a:r>
-              <a:rPr lang="en-US" sz="1700" dirty="0">
-                <a:solidFill>
-                  <a:srgbClr val="101828"/>
+              <a:buNone/>
+            </a:pPr>
+            <a:r>
+              <a:rPr lang="en-US" sz="1600" b="1" dirty="0">
+                <a:solidFill>
+                  <a:srgbClr val="08A6A6"/>
                 </a:solidFill>
                 <a:latin typeface="IBM Plex Sans" pitchFamily="34" charset="0"/>
                 <a:ea typeface="IBM Plex Sans" pitchFamily="34" charset="-122"/>
                 <a:cs typeface="IBM Plex Sans" pitchFamily="34" charset="-120"/>
               </a:rPr>
-              <a:t>Explain the difference between a procedure and a function.</a:t>
-            </a:r>
-            <a:endParaRPr lang="en-US" sz="1700" dirty="0"/>
+              <a:t>Why zero</a:t>
+            </a:r>
+            <a:endParaRPr lang="en-US" sz="1600" dirty="0"/>
+          </a:p>
+        </p:txBody>
+      </p:sp>
+      <p:sp>
+        <p:nvSpPr>
+          <p:cNvPr id="12" name="Text 10"/>
+          <p:cNvSpPr txBox="1"/>
+          <p:nvPr/>
+        </p:nvSpPr>
+        <p:spPr>
+          <a:xfrm>
+            <a:off x="6537960" y="2395728"/>
+            <a:ext cx="4754880" cy="1005840"/>
+          </a:xfrm>
+          <a:prstGeom prst="rect">
+            <a:avLst/>
+          </a:prstGeom>
+          <a:noFill/>
+          <a:ln/>
+        </p:spPr>
+        <p:txBody>
+          <a:bodyPr wrap="square" lIns="0" tIns="0" rIns="0" bIns="0" rtlCol="0" anchor="t"/>
+          <a:lstStyle/>
+          <a:p>
+            <a:pPr indent="0" marL="0">
+              <a:lnSpc>
+                <a:spcPct val="120000"/>
+              </a:lnSpc>
+              <a:buNone/>
+            </a:pPr>
+            <a:r>
+              <a:rPr lang="en-US" sz="1300" dirty="0">
+                <a:solidFill>
+                  <a:srgbClr val="667085"/>
+                </a:solidFill>
+                <a:latin typeface="IBM Plex Sans" pitchFamily="34" charset="0"/>
+                <a:ea typeface="IBM Plex Sans" pitchFamily="34" charset="-122"/>
+                <a:cs typeface="IBM Plex Sans" pitchFamily="34" charset="-120"/>
+              </a:rPr>
+              <a:t>The index is really how far an element sits from the start of the array, so the very first element is nothing at all from the start, which is zero. Reading one element is then a single calculation rather than a search.</a:t>
+            </a:r>
+            <a:endParaRPr lang="en-US" sz="1300" dirty="0"/>
           </a:p>
         </p:txBody>
       </p:sp>
@@ -4204,73 +4468,12 @@
         </p:nvSpPr>
         <p:spPr>
           <a:xfrm>
-            <a:off x="10515600" y="3429000"/>
-            <a:ext cx="868680" cy="493776"/>
+            <a:off x="502920" y="3794760"/>
+            <a:ext cx="5394960" cy="1737360"/>
           </a:xfrm>
           <a:prstGeom prst="roundRect">
             <a:avLst>
-              <a:gd name="adj" fmla="val 18519"/>
-            </a:avLst>
-          </a:prstGeom>
-          <a:solidFill>
-            <a:srgbClr val="EEF2FB"/>
-          </a:solidFill>
-          <a:ln/>
-        </p:spPr>
-      </p:sp>
-      <p:sp>
-        <p:nvSpPr>
-          <p:cNvPr id="14" name="Text 12"/>
-          <p:cNvSpPr txBox="1"/>
-          <p:nvPr/>
-        </p:nvSpPr>
-        <p:spPr>
-          <a:xfrm>
-            <a:off x="10515600" y="3429000"/>
-            <a:ext cx="868680" cy="493776"/>
-          </a:xfrm>
-          <a:prstGeom prst="rect">
-            <a:avLst/>
-          </a:prstGeom>
-          <a:noFill/>
-          <a:ln/>
-        </p:spPr>
-        <p:txBody>
-          <a:bodyPr wrap="square" lIns="0" tIns="0" rIns="0" bIns="0" rtlCol="0" anchor="ctr"/>
-          <a:lstStyle/>
-          <a:p>
-            <a:pPr algn="ctr" indent="0" marL="0">
-              <a:buNone/>
-            </a:pPr>
-            <a:r>
-              <a:rPr lang="en-US" sz="1500" b="1" dirty="0">
-                <a:solidFill>
-                  <a:srgbClr val="2D63FF"/>
-                </a:solidFill>
-                <a:latin typeface="IBM Plex Mono" pitchFamily="34" charset="0"/>
-                <a:ea typeface="IBM Plex Mono" pitchFamily="34" charset="-122"/>
-                <a:cs typeface="IBM Plex Mono" pitchFamily="34" charset="-120"/>
-              </a:rPr>
-              <a:t>[3]</a:t>
-            </a:r>
-            <a:endParaRPr lang="en-US" sz="1500" dirty="0"/>
-          </a:p>
-        </p:txBody>
-      </p:sp>
-      <p:sp>
-        <p:nvSpPr>
-          <p:cNvPr id="15" name="Shape 13"/>
-          <p:cNvSpPr/>
-          <p:nvPr/>
-        </p:nvSpPr>
-        <p:spPr>
-          <a:xfrm>
-            <a:off x="502920" y="4425696"/>
-            <a:ext cx="11155680" cy="1097280"/>
-          </a:xfrm>
-          <a:prstGeom prst="roundRect">
-            <a:avLst>
-              <a:gd name="adj" fmla="val 10000"/>
+              <a:gd name="adj" fmla="val 6316"/>
             </a:avLst>
           </a:prstGeom>
           <a:solidFill>
@@ -4278,7 +4481,7 @@
           </a:solidFill>
           <a:ln w="15875">
             <a:solidFill>
-              <a:srgbClr val="D9DEE7"/>
+              <a:srgbClr val="2D63FF"/>
             </a:solidFill>
             <a:prstDash val="solid"/>
           </a:ln>
@@ -4286,14 +4489,14 @@
       </p:sp>
       <p:sp>
         <p:nvSpPr>
-          <p:cNvPr id="16" name="Text 14"/>
-          <p:cNvSpPr txBox="1"/>
-          <p:nvPr/>
-        </p:nvSpPr>
-        <p:spPr>
-          <a:xfrm>
-            <a:off x="914400" y="4535424"/>
-            <a:ext cx="9418320" cy="877824"/>
+          <p:cNvPr id="14" name="Text 12"/>
+          <p:cNvSpPr txBox="1"/>
+          <p:nvPr/>
+        </p:nvSpPr>
+        <p:spPr>
+          <a:xfrm>
+            <a:off x="822960" y="3977640"/>
+            <a:ext cx="4754880" cy="365760"/>
           </a:xfrm>
           <a:prstGeom prst="rect">
             <a:avLst/>
@@ -4306,47 +4509,130 @@
           <a:lstStyle/>
           <a:p>
             <a:pPr indent="0" marL="0">
-              <a:lnSpc>
-                <a:spcPct val="118000"/>
-              </a:lnSpc>
-              <a:buNone/>
-            </a:pPr>
-            <a:r>
-              <a:rPr lang="en-US" sz="1700" dirty="0">
-                <a:solidFill>
-                  <a:srgbClr val="101828"/>
+              <a:buNone/>
+            </a:pPr>
+            <a:r>
+              <a:rPr lang="en-US" sz="1600" b="1" dirty="0">
+                <a:solidFill>
+                  <a:srgbClr val="2D63FF"/>
                 </a:solidFill>
                 <a:latin typeface="IBM Plex Sans" pitchFamily="34" charset="0"/>
                 <a:ea typeface="IBM Plex Sans" pitchFamily="34" charset="-122"/>
                 <a:cs typeface="IBM Plex Sans" pitchFamily="34" charset="-120"/>
               </a:rPr>
-              <a:t>A program stores five crate weights in  array crate[5].  Write an algorithm that outputs the total of all five weights, using the OCR Exam Reference Language or a language you know.</a:t>
-            </a:r>
-            <a:endParaRPr lang="en-US" sz="1700" dirty="0"/>
-          </a:p>
-        </p:txBody>
-      </p:sp>
-      <p:sp>
-        <p:nvSpPr>
-          <p:cNvPr id="17" name="Shape 15"/>
+              <a:t>Rows then columns</a:t>
+            </a:r>
+            <a:endParaRPr lang="en-US" sz="1600" dirty="0"/>
+          </a:p>
+        </p:txBody>
+      </p:sp>
+      <p:sp>
+        <p:nvSpPr>
+          <p:cNvPr id="15" name="Text 13"/>
+          <p:cNvSpPr txBox="1"/>
+          <p:nvPr/>
+        </p:nvSpPr>
+        <p:spPr>
+          <a:xfrm>
+            <a:off x="822960" y="4361688"/>
+            <a:ext cx="4754880" cy="1005840"/>
+          </a:xfrm>
+          <a:prstGeom prst="rect">
+            <a:avLst/>
+          </a:prstGeom>
+          <a:noFill/>
+          <a:ln/>
+        </p:spPr>
+        <p:txBody>
+          <a:bodyPr wrap="square" lIns="0" tIns="0" rIns="0" bIns="0" rtlCol="0" anchor="t"/>
+          <a:lstStyle/>
+          <a:p>
+            <a:pPr indent="0" marL="0">
+              <a:lnSpc>
+                <a:spcPct val="120000"/>
+              </a:lnSpc>
+              <a:buNone/>
+            </a:pPr>
+            <a:r>
+              <a:rPr lang="en-US" sz="1300" dirty="0">
+                <a:solidFill>
+                  <a:srgbClr val="667085"/>
+                </a:solidFill>
+                <a:latin typeface="IBM Plex Sans" pitchFamily="34" charset="0"/>
+                <a:ea typeface="IBM Plex Sans" pitchFamily="34" charset="-122"/>
+                <a:cs typeface="IBM Plex Sans" pitchFamily="34" charset="-120"/>
+              </a:rPr>
+              <a:t>Almost every language writes a two-dimensional array as row first and column second. Getting those two the wrong way round in a nested loop is one of the most common bugs in Year 11 coursework.</a:t>
+            </a:r>
+            <a:endParaRPr lang="en-US" sz="1300" dirty="0"/>
+          </a:p>
+        </p:txBody>
+      </p:sp>
+      <p:sp>
+        <p:nvSpPr>
+          <p:cNvPr id="16" name="Shape 14"/>
           <p:cNvSpPr/>
           <p:nvPr/>
         </p:nvSpPr>
         <p:spPr>
           <a:xfrm>
-            <a:off x="10515600" y="4727448"/>
-            <a:ext cx="868680" cy="493776"/>
+            <a:off x="6217920" y="3794760"/>
+            <a:ext cx="5394960" cy="1737360"/>
           </a:xfrm>
           <a:prstGeom prst="roundRect">
             <a:avLst>
-              <a:gd name="adj" fmla="val 18519"/>
+              <a:gd name="adj" fmla="val 6316"/>
             </a:avLst>
           </a:prstGeom>
           <a:solidFill>
-            <a:srgbClr val="EEF2FB"/>
+            <a:srgbClr val="FFFFFF"/>
           </a:solidFill>
-          <a:ln/>
-        </p:spPr>
+          <a:ln w="15875">
+            <a:solidFill>
+              <a:srgbClr val="08A6A6"/>
+            </a:solidFill>
+            <a:prstDash val="solid"/>
+          </a:ln>
+        </p:spPr>
+      </p:sp>
+      <p:sp>
+        <p:nvSpPr>
+          <p:cNvPr id="17" name="Text 15"/>
+          <p:cNvSpPr txBox="1"/>
+          <p:nvPr/>
+        </p:nvSpPr>
+        <p:spPr>
+          <a:xfrm>
+            <a:off x="6537960" y="3977640"/>
+            <a:ext cx="4754880" cy="365760"/>
+          </a:xfrm>
+          <a:prstGeom prst="rect">
+            <a:avLst/>
+          </a:prstGeom>
+          <a:noFill/>
+          <a:ln/>
+        </p:spPr>
+        <p:txBody>
+          <a:bodyPr wrap="square" lIns="0" tIns="0" rIns="0" bIns="0" rtlCol="0" anchor="ctr"/>
+          <a:lstStyle/>
+          <a:p>
+            <a:pPr indent="0" marL="0">
+              <a:buNone/>
+            </a:pPr>
+            <a:r>
+              <a:rPr lang="en-US" sz="1600" b="1" dirty="0">
+                <a:solidFill>
+                  <a:srgbClr val="08A6A6"/>
+                </a:solidFill>
+                <a:latin typeface="IBM Plex Sans" pitchFamily="34" charset="0"/>
+                <a:ea typeface="IBM Plex Sans" pitchFamily="34" charset="-122"/>
+                <a:cs typeface="IBM Plex Sans" pitchFamily="34" charset="-120"/>
+              </a:rPr>
+              <a:t>Why bother</a:t>
+            </a:r>
+            <a:endParaRPr lang="en-US" sz="1600" dirty="0"/>
+          </a:p>
+        </p:txBody>
       </p:sp>
       <p:sp>
         <p:nvSpPr>
@@ -4356,34 +4642,37 @@
         </p:nvSpPr>
         <p:spPr>
           <a:xfrm>
-            <a:off x="10515600" y="4727448"/>
-            <a:ext cx="868680" cy="493776"/>
-          </a:xfrm>
-          <a:prstGeom prst="rect">
-            <a:avLst/>
-          </a:prstGeom>
-          <a:noFill/>
-          <a:ln/>
-        </p:spPr>
-        <p:txBody>
-          <a:bodyPr wrap="square" lIns="0" tIns="0" rIns="0" bIns="0" rtlCol="0" anchor="ctr"/>
-          <a:lstStyle/>
-          <a:p>
-            <a:pPr algn="ctr" indent="0" marL="0">
-              <a:buNone/>
-            </a:pPr>
-            <a:r>
-              <a:rPr lang="en-US" sz="1500" b="1" dirty="0">
-                <a:solidFill>
-                  <a:srgbClr val="2D63FF"/>
-                </a:solidFill>
-                <a:latin typeface="IBM Plex Mono" pitchFamily="34" charset="0"/>
-                <a:ea typeface="IBM Plex Mono" pitchFamily="34" charset="-122"/>
-                <a:cs typeface="IBM Plex Mono" pitchFamily="34" charset="-120"/>
-              </a:rPr>
-              <a:t>[5]</a:t>
-            </a:r>
-            <a:endParaRPr lang="en-US" sz="1500" dirty="0"/>
+            <a:off x="6537960" y="4361688"/>
+            <a:ext cx="4754880" cy="1005840"/>
+          </a:xfrm>
+          <a:prstGeom prst="rect">
+            <a:avLst/>
+          </a:prstGeom>
+          <a:noFill/>
+          <a:ln/>
+        </p:spPr>
+        <p:txBody>
+          <a:bodyPr wrap="square" lIns="0" tIns="0" rIns="0" bIns="0" rtlCol="0" anchor="t"/>
+          <a:lstStyle/>
+          <a:p>
+            <a:pPr indent="0" marL="0">
+              <a:lnSpc>
+                <a:spcPct val="120000"/>
+              </a:lnSpc>
+              <a:buNone/>
+            </a:pPr>
+            <a:r>
+              <a:rPr lang="en-US" sz="1300" dirty="0">
+                <a:solidFill>
+                  <a:srgbClr val="667085"/>
+                </a:solidFill>
+                <a:latin typeface="IBM Plex Sans" pitchFamily="34" charset="0"/>
+                <a:ea typeface="IBM Plex Sans" pitchFamily="34" charset="-122"/>
+                <a:cs typeface="IBM Plex Sans" pitchFamily="34" charset="-120"/>
+              </a:rPr>
+              <a:t>Sub-programs are how a large program stays understandable. Each one can be written, tested and fixed on its own, and a sub-program written once can be reused in a completely different program.</a:t>
+            </a:r>
+            <a:endParaRPr lang="en-US" sz="1300" dirty="0"/>
           </a:p>
         </p:txBody>
       </p:sp>
@@ -4398,6 +4687,604 @@
 <file path=ppt/slides/slide14.xml><?xml version="1.0" encoding="utf-8"?>
 <p:sld xmlns:a="http://schemas.openxmlformats.org/drawingml/2006/main" xmlns:r="http://schemas.openxmlformats.org/officeDocument/2006/relationships" xmlns:p="http://schemas.openxmlformats.org/presentationml/2006/main">
   <p:cSld name="Slide 14">
+    <p:bg>
+      <p:bgPr>
+        <a:solidFill>
+          <a:srgbClr val="F7F7F4"/>
+        </a:solidFill>
+      </p:bgPr>
+    </p:bg>
+    <p:spTree>
+      <p:nvGrpSpPr>
+        <p:cNvPr id="1" name=""/>
+        <p:cNvGrpSpPr/>
+        <p:nvPr/>
+      </p:nvGrpSpPr>
+      <p:grpSpPr>
+        <a:xfrm>
+          <a:off x="0" y="0"/>
+          <a:ext cx="0" cy="0"/>
+          <a:chOff x="0" y="0"/>
+          <a:chExt cx="0" cy="0"/>
+        </a:xfrm>
+      </p:grpSpPr>
+      <p:sp>
+        <p:nvSpPr>
+          <p:cNvPr id="2" name="Shape 0"/>
+          <p:cNvSpPr/>
+          <p:nvPr/>
+        </p:nvSpPr>
+        <p:spPr>
+          <a:xfrm>
+            <a:off x="0" y="0"/>
+            <a:ext cx="12188952" cy="82296"/>
+          </a:xfrm>
+          <a:prstGeom prst="rect">
+            <a:avLst/>
+          </a:prstGeom>
+          <a:solidFill>
+            <a:srgbClr val="2D63FF"/>
+          </a:solidFill>
+          <a:ln/>
+        </p:spPr>
+      </p:sp>
+      <p:sp>
+        <p:nvSpPr>
+          <p:cNvPr id="3" name="Text 1"/>
+          <p:cNvSpPr txBox="1"/>
+          <p:nvPr/>
+        </p:nvSpPr>
+        <p:spPr>
+          <a:xfrm>
+            <a:off x="502920" y="6236208"/>
+            <a:ext cx="7772400" cy="365760"/>
+          </a:xfrm>
+          <a:prstGeom prst="rect">
+            <a:avLst/>
+          </a:prstGeom>
+          <a:noFill/>
+          <a:ln/>
+        </p:spPr>
+        <p:txBody>
+          <a:bodyPr wrap="square" lIns="0" tIns="0" rIns="0" bIns="0" rtlCol="0" anchor="ctr"/>
+          <a:lstStyle/>
+          <a:p>
+            <a:pPr indent="0" marL="0">
+              <a:buNone/>
+            </a:pPr>
+            <a:r>
+              <a:rPr lang="en-US" sz="1100" dirty="0">
+                <a:solidFill>
+                  <a:srgbClr val="667085"/>
+                </a:solidFill>
+                <a:latin typeface="IBM Plex Mono" pitchFamily="34" charset="0"/>
+                <a:ea typeface="IBM Plex Mono" pitchFamily="34" charset="-122"/>
+                <a:cs typeface="IBM Plex Mono" pitchFamily="34" charset="-120"/>
+              </a:rPr>
+              <a:t>2.2 Programming fundamentals  |  Lesson 5</a:t>
+            </a:r>
+            <a:endParaRPr lang="en-US" sz="1100" dirty="0"/>
+          </a:p>
+        </p:txBody>
+      </p:sp>
+      <p:sp>
+        <p:nvSpPr>
+          <p:cNvPr id="4" name="Text 2"/>
+          <p:cNvSpPr txBox="1"/>
+          <p:nvPr/>
+        </p:nvSpPr>
+        <p:spPr>
+          <a:xfrm>
+            <a:off x="9326880" y="6236208"/>
+            <a:ext cx="2377440" cy="365760"/>
+          </a:xfrm>
+          <a:prstGeom prst="rect">
+            <a:avLst/>
+          </a:prstGeom>
+          <a:noFill/>
+          <a:ln/>
+        </p:spPr>
+        <p:txBody>
+          <a:bodyPr wrap="square" lIns="0" tIns="0" rIns="0" bIns="0" rtlCol="0" anchor="ctr"/>
+          <a:lstStyle/>
+          <a:p>
+            <a:pPr algn="r" indent="0" marL="0">
+              <a:buNone/>
+            </a:pPr>
+            <a:r>
+              <a:rPr lang="en-US" sz="1100" dirty="0">
+                <a:solidFill>
+                  <a:srgbClr val="667085"/>
+                </a:solidFill>
+                <a:latin typeface="IBM Plex Mono" pitchFamily="34" charset="0"/>
+                <a:ea typeface="IBM Plex Mono" pitchFamily="34" charset="-122"/>
+                <a:cs typeface="IBM Plex Mono" pitchFamily="34" charset="-120"/>
+              </a:rPr>
+              <a:t>Revise 360</a:t>
+            </a:r>
+            <a:endParaRPr lang="en-US" sz="1100" dirty="0"/>
+          </a:p>
+        </p:txBody>
+      </p:sp>
+      <p:sp>
+        <p:nvSpPr>
+          <p:cNvPr id="5" name="Text 3"/>
+          <p:cNvSpPr txBox="1"/>
+          <p:nvPr/>
+        </p:nvSpPr>
+        <p:spPr>
+          <a:xfrm>
+            <a:off x="502920" y="411480"/>
+            <a:ext cx="11155680" cy="777240"/>
+          </a:xfrm>
+          <a:prstGeom prst="rect">
+            <a:avLst/>
+          </a:prstGeom>
+          <a:noFill/>
+          <a:ln/>
+        </p:spPr>
+        <p:txBody>
+          <a:bodyPr wrap="square" lIns="0" tIns="0" rIns="0" bIns="0" rtlCol="0" anchor="ctr"/>
+          <a:lstStyle/>
+          <a:p>
+            <a:pPr indent="0" marL="0">
+              <a:buNone/>
+            </a:pPr>
+            <a:r>
+              <a:rPr lang="en-US" sz="3200" b="1" dirty="0">
+                <a:solidFill>
+                  <a:srgbClr val="101828"/>
+                </a:solidFill>
+                <a:latin typeface="IBM Plex Sans" pitchFamily="34" charset="0"/>
+                <a:ea typeface="IBM Plex Sans" pitchFamily="34" charset="-122"/>
+                <a:cs typeface="IBM Plex Sans" pitchFamily="34" charset="-120"/>
+              </a:rPr>
+              <a:t>Exam practice</a:t>
+            </a:r>
+            <a:endParaRPr lang="en-US" sz="3200" dirty="0"/>
+          </a:p>
+        </p:txBody>
+      </p:sp>
+      <p:sp>
+        <p:nvSpPr>
+          <p:cNvPr id="6" name="Text 4"/>
+          <p:cNvSpPr txBox="1"/>
+          <p:nvPr/>
+        </p:nvSpPr>
+        <p:spPr>
+          <a:xfrm>
+            <a:off x="502920" y="1170432"/>
+            <a:ext cx="11155680" cy="411480"/>
+          </a:xfrm>
+          <a:prstGeom prst="rect">
+            <a:avLst/>
+          </a:prstGeom>
+          <a:noFill/>
+          <a:ln/>
+        </p:spPr>
+        <p:txBody>
+          <a:bodyPr wrap="square" lIns="0" tIns="0" rIns="0" bIns="0" rtlCol="0" anchor="ctr"/>
+          <a:lstStyle/>
+          <a:p>
+            <a:pPr indent="0" marL="0">
+              <a:buNone/>
+            </a:pPr>
+            <a:r>
+              <a:rPr lang="en-US" sz="1500" dirty="0">
+                <a:solidFill>
+                  <a:srgbClr val="667085"/>
+                </a:solidFill>
+                <a:latin typeface="IBM Plex Sans" pitchFamily="34" charset="0"/>
+                <a:ea typeface="IBM Plex Sans" pitchFamily="34" charset="-122"/>
+                <a:cs typeface="IBM Plex Sans" pitchFamily="34" charset="-120"/>
+              </a:rPr>
+              <a:t>Devices away. Answer from memory on the worksheet.</a:t>
+            </a:r>
+            <a:endParaRPr lang="en-US" sz="1500" dirty="0"/>
+          </a:p>
+        </p:txBody>
+      </p:sp>
+      <p:sp>
+        <p:nvSpPr>
+          <p:cNvPr id="7" name="Shape 5"/>
+          <p:cNvSpPr/>
+          <p:nvPr/>
+        </p:nvSpPr>
+        <p:spPr>
+          <a:xfrm>
+            <a:off x="502920" y="1828800"/>
+            <a:ext cx="11155680" cy="1097280"/>
+          </a:xfrm>
+          <a:prstGeom prst="roundRect">
+            <a:avLst>
+              <a:gd name="adj" fmla="val 10000"/>
+            </a:avLst>
+          </a:prstGeom>
+          <a:solidFill>
+            <a:srgbClr val="FFFFFF"/>
+          </a:solidFill>
+          <a:ln w="15875">
+            <a:solidFill>
+              <a:srgbClr val="D9DEE7"/>
+            </a:solidFill>
+            <a:prstDash val="solid"/>
+          </a:ln>
+        </p:spPr>
+      </p:sp>
+      <p:sp>
+        <p:nvSpPr>
+          <p:cNvPr id="8" name="Text 6"/>
+          <p:cNvSpPr txBox="1"/>
+          <p:nvPr/>
+        </p:nvSpPr>
+        <p:spPr>
+          <a:xfrm>
+            <a:off x="914400" y="1938528"/>
+            <a:ext cx="9418320" cy="877824"/>
+          </a:xfrm>
+          <a:prstGeom prst="rect">
+            <a:avLst/>
+          </a:prstGeom>
+          <a:noFill/>
+          <a:ln/>
+        </p:spPr>
+        <p:txBody>
+          <a:bodyPr wrap="square" lIns="0" tIns="0" rIns="0" bIns="0" rtlCol="0" anchor="ctr"/>
+          <a:lstStyle/>
+          <a:p>
+            <a:pPr indent="0" marL="0">
+              <a:lnSpc>
+                <a:spcPct val="118000"/>
+              </a:lnSpc>
+              <a:buNone/>
+            </a:pPr>
+            <a:r>
+              <a:rPr lang="en-US" sz="1700" dirty="0">
+                <a:solidFill>
+                  <a:srgbClr val="101828"/>
+                </a:solidFill>
+                <a:latin typeface="IBM Plex Sans" pitchFamily="34" charset="0"/>
+                <a:ea typeface="IBM Plex Sans" pitchFamily="34" charset="-122"/>
+                <a:cs typeface="IBM Plex Sans" pitchFamily="34" charset="-120"/>
+              </a:rPr>
+              <a:t>An array is declared as  array scores[6].  State the index of the first element and the index of the last element.</a:t>
+            </a:r>
+            <a:endParaRPr lang="en-US" sz="1700" dirty="0"/>
+          </a:p>
+        </p:txBody>
+      </p:sp>
+      <p:sp>
+        <p:nvSpPr>
+          <p:cNvPr id="9" name="Shape 7"/>
+          <p:cNvSpPr/>
+          <p:nvPr/>
+        </p:nvSpPr>
+        <p:spPr>
+          <a:xfrm>
+            <a:off x="10515600" y="2130552"/>
+            <a:ext cx="868680" cy="493776"/>
+          </a:xfrm>
+          <a:prstGeom prst="roundRect">
+            <a:avLst>
+              <a:gd name="adj" fmla="val 18519"/>
+            </a:avLst>
+          </a:prstGeom>
+          <a:solidFill>
+            <a:srgbClr val="EEF2FB"/>
+          </a:solidFill>
+          <a:ln/>
+        </p:spPr>
+      </p:sp>
+      <p:sp>
+        <p:nvSpPr>
+          <p:cNvPr id="10" name="Text 8"/>
+          <p:cNvSpPr txBox="1"/>
+          <p:nvPr/>
+        </p:nvSpPr>
+        <p:spPr>
+          <a:xfrm>
+            <a:off x="10515600" y="2130552"/>
+            <a:ext cx="868680" cy="493776"/>
+          </a:xfrm>
+          <a:prstGeom prst="rect">
+            <a:avLst/>
+          </a:prstGeom>
+          <a:noFill/>
+          <a:ln/>
+        </p:spPr>
+        <p:txBody>
+          <a:bodyPr wrap="square" lIns="0" tIns="0" rIns="0" bIns="0" rtlCol="0" anchor="ctr"/>
+          <a:lstStyle/>
+          <a:p>
+            <a:pPr algn="ctr" indent="0" marL="0">
+              <a:buNone/>
+            </a:pPr>
+            <a:r>
+              <a:rPr lang="en-US" sz="1500" b="1" dirty="0">
+                <a:solidFill>
+                  <a:srgbClr val="2D63FF"/>
+                </a:solidFill>
+                <a:latin typeface="IBM Plex Mono" pitchFamily="34" charset="0"/>
+                <a:ea typeface="IBM Plex Mono" pitchFamily="34" charset="-122"/>
+                <a:cs typeface="IBM Plex Mono" pitchFamily="34" charset="-120"/>
+              </a:rPr>
+              <a:t>[2]</a:t>
+            </a:r>
+            <a:endParaRPr lang="en-US" sz="1500" dirty="0"/>
+          </a:p>
+        </p:txBody>
+      </p:sp>
+      <p:sp>
+        <p:nvSpPr>
+          <p:cNvPr id="11" name="Shape 9"/>
+          <p:cNvSpPr/>
+          <p:nvPr/>
+        </p:nvSpPr>
+        <p:spPr>
+          <a:xfrm>
+            <a:off x="502920" y="3127248"/>
+            <a:ext cx="11155680" cy="1097280"/>
+          </a:xfrm>
+          <a:prstGeom prst="roundRect">
+            <a:avLst>
+              <a:gd name="adj" fmla="val 10000"/>
+            </a:avLst>
+          </a:prstGeom>
+          <a:solidFill>
+            <a:srgbClr val="FFFFFF"/>
+          </a:solidFill>
+          <a:ln w="15875">
+            <a:solidFill>
+              <a:srgbClr val="D9DEE7"/>
+            </a:solidFill>
+            <a:prstDash val="solid"/>
+          </a:ln>
+        </p:spPr>
+      </p:sp>
+      <p:sp>
+        <p:nvSpPr>
+          <p:cNvPr id="12" name="Text 10"/>
+          <p:cNvSpPr txBox="1"/>
+          <p:nvPr/>
+        </p:nvSpPr>
+        <p:spPr>
+          <a:xfrm>
+            <a:off x="914400" y="3236976"/>
+            <a:ext cx="9418320" cy="877824"/>
+          </a:xfrm>
+          <a:prstGeom prst="rect">
+            <a:avLst/>
+          </a:prstGeom>
+          <a:noFill/>
+          <a:ln/>
+        </p:spPr>
+        <p:txBody>
+          <a:bodyPr wrap="square" lIns="0" tIns="0" rIns="0" bIns="0" rtlCol="0" anchor="ctr"/>
+          <a:lstStyle/>
+          <a:p>
+            <a:pPr indent="0" marL="0">
+              <a:lnSpc>
+                <a:spcPct val="118000"/>
+              </a:lnSpc>
+              <a:buNone/>
+            </a:pPr>
+            <a:r>
+              <a:rPr lang="en-US" sz="1700" dirty="0">
+                <a:solidFill>
+                  <a:srgbClr val="101828"/>
+                </a:solidFill>
+                <a:latin typeface="IBM Plex Sans" pitchFamily="34" charset="0"/>
+                <a:ea typeface="IBM Plex Sans" pitchFamily="34" charset="-122"/>
+                <a:cs typeface="IBM Plex Sans" pitchFamily="34" charset="-120"/>
+              </a:rPr>
+              <a:t>Explain the difference between a procedure and a function.</a:t>
+            </a:r>
+            <a:endParaRPr lang="en-US" sz="1700" dirty="0"/>
+          </a:p>
+        </p:txBody>
+      </p:sp>
+      <p:sp>
+        <p:nvSpPr>
+          <p:cNvPr id="13" name="Shape 11"/>
+          <p:cNvSpPr/>
+          <p:nvPr/>
+        </p:nvSpPr>
+        <p:spPr>
+          <a:xfrm>
+            <a:off x="10515600" y="3429000"/>
+            <a:ext cx="868680" cy="493776"/>
+          </a:xfrm>
+          <a:prstGeom prst="roundRect">
+            <a:avLst>
+              <a:gd name="adj" fmla="val 18519"/>
+            </a:avLst>
+          </a:prstGeom>
+          <a:solidFill>
+            <a:srgbClr val="EEF2FB"/>
+          </a:solidFill>
+          <a:ln/>
+        </p:spPr>
+      </p:sp>
+      <p:sp>
+        <p:nvSpPr>
+          <p:cNvPr id="14" name="Text 12"/>
+          <p:cNvSpPr txBox="1"/>
+          <p:nvPr/>
+        </p:nvSpPr>
+        <p:spPr>
+          <a:xfrm>
+            <a:off x="10515600" y="3429000"/>
+            <a:ext cx="868680" cy="493776"/>
+          </a:xfrm>
+          <a:prstGeom prst="rect">
+            <a:avLst/>
+          </a:prstGeom>
+          <a:noFill/>
+          <a:ln/>
+        </p:spPr>
+        <p:txBody>
+          <a:bodyPr wrap="square" lIns="0" tIns="0" rIns="0" bIns="0" rtlCol="0" anchor="ctr"/>
+          <a:lstStyle/>
+          <a:p>
+            <a:pPr algn="ctr" indent="0" marL="0">
+              <a:buNone/>
+            </a:pPr>
+            <a:r>
+              <a:rPr lang="en-US" sz="1500" b="1" dirty="0">
+                <a:solidFill>
+                  <a:srgbClr val="2D63FF"/>
+                </a:solidFill>
+                <a:latin typeface="IBM Plex Mono" pitchFamily="34" charset="0"/>
+                <a:ea typeface="IBM Plex Mono" pitchFamily="34" charset="-122"/>
+                <a:cs typeface="IBM Plex Mono" pitchFamily="34" charset="-120"/>
+              </a:rPr>
+              <a:t>[3]</a:t>
+            </a:r>
+            <a:endParaRPr lang="en-US" sz="1500" dirty="0"/>
+          </a:p>
+        </p:txBody>
+      </p:sp>
+      <p:sp>
+        <p:nvSpPr>
+          <p:cNvPr id="15" name="Shape 13"/>
+          <p:cNvSpPr/>
+          <p:nvPr/>
+        </p:nvSpPr>
+        <p:spPr>
+          <a:xfrm>
+            <a:off x="502920" y="4425696"/>
+            <a:ext cx="11155680" cy="1097280"/>
+          </a:xfrm>
+          <a:prstGeom prst="roundRect">
+            <a:avLst>
+              <a:gd name="adj" fmla="val 10000"/>
+            </a:avLst>
+          </a:prstGeom>
+          <a:solidFill>
+            <a:srgbClr val="FFFFFF"/>
+          </a:solidFill>
+          <a:ln w="15875">
+            <a:solidFill>
+              <a:srgbClr val="D9DEE7"/>
+            </a:solidFill>
+            <a:prstDash val="solid"/>
+          </a:ln>
+        </p:spPr>
+      </p:sp>
+      <p:sp>
+        <p:nvSpPr>
+          <p:cNvPr id="16" name="Text 14"/>
+          <p:cNvSpPr txBox="1"/>
+          <p:nvPr/>
+        </p:nvSpPr>
+        <p:spPr>
+          <a:xfrm>
+            <a:off x="914400" y="4535424"/>
+            <a:ext cx="9418320" cy="877824"/>
+          </a:xfrm>
+          <a:prstGeom prst="rect">
+            <a:avLst/>
+          </a:prstGeom>
+          <a:noFill/>
+          <a:ln/>
+        </p:spPr>
+        <p:txBody>
+          <a:bodyPr wrap="square" lIns="0" tIns="0" rIns="0" bIns="0" rtlCol="0" anchor="ctr"/>
+          <a:lstStyle/>
+          <a:p>
+            <a:pPr indent="0" marL="0">
+              <a:lnSpc>
+                <a:spcPct val="118000"/>
+              </a:lnSpc>
+              <a:buNone/>
+            </a:pPr>
+            <a:r>
+              <a:rPr lang="en-US" sz="1700" dirty="0">
+                <a:solidFill>
+                  <a:srgbClr val="101828"/>
+                </a:solidFill>
+                <a:latin typeface="IBM Plex Sans" pitchFamily="34" charset="0"/>
+                <a:ea typeface="IBM Plex Sans" pitchFamily="34" charset="-122"/>
+                <a:cs typeface="IBM Plex Sans" pitchFamily="34" charset="-120"/>
+              </a:rPr>
+              <a:t>A program stores five crate weights in  array crate[5].  Write an algorithm that outputs the total of all five weights, using the OCR Exam Reference Language or a language you know.</a:t>
+            </a:r>
+            <a:endParaRPr lang="en-US" sz="1700" dirty="0"/>
+          </a:p>
+        </p:txBody>
+      </p:sp>
+      <p:sp>
+        <p:nvSpPr>
+          <p:cNvPr id="17" name="Shape 15"/>
+          <p:cNvSpPr/>
+          <p:nvPr/>
+        </p:nvSpPr>
+        <p:spPr>
+          <a:xfrm>
+            <a:off x="10515600" y="4727448"/>
+            <a:ext cx="868680" cy="493776"/>
+          </a:xfrm>
+          <a:prstGeom prst="roundRect">
+            <a:avLst>
+              <a:gd name="adj" fmla="val 18519"/>
+            </a:avLst>
+          </a:prstGeom>
+          <a:solidFill>
+            <a:srgbClr val="EEF2FB"/>
+          </a:solidFill>
+          <a:ln/>
+        </p:spPr>
+      </p:sp>
+      <p:sp>
+        <p:nvSpPr>
+          <p:cNvPr id="18" name="Text 16"/>
+          <p:cNvSpPr txBox="1"/>
+          <p:nvPr/>
+        </p:nvSpPr>
+        <p:spPr>
+          <a:xfrm>
+            <a:off x="10515600" y="4727448"/>
+            <a:ext cx="868680" cy="493776"/>
+          </a:xfrm>
+          <a:prstGeom prst="rect">
+            <a:avLst/>
+          </a:prstGeom>
+          <a:noFill/>
+          <a:ln/>
+        </p:spPr>
+        <p:txBody>
+          <a:bodyPr wrap="square" lIns="0" tIns="0" rIns="0" bIns="0" rtlCol="0" anchor="ctr"/>
+          <a:lstStyle/>
+          <a:p>
+            <a:pPr algn="ctr" indent="0" marL="0">
+              <a:buNone/>
+            </a:pPr>
+            <a:r>
+              <a:rPr lang="en-US" sz="1500" b="1" dirty="0">
+                <a:solidFill>
+                  <a:srgbClr val="2D63FF"/>
+                </a:solidFill>
+                <a:latin typeface="IBM Plex Mono" pitchFamily="34" charset="0"/>
+                <a:ea typeface="IBM Plex Mono" pitchFamily="34" charset="-122"/>
+                <a:cs typeface="IBM Plex Mono" pitchFamily="34" charset="-120"/>
+              </a:rPr>
+              <a:t>[5]</a:t>
+            </a:r>
+            <a:endParaRPr lang="en-US" sz="1500" dirty="0"/>
+          </a:p>
+        </p:txBody>
+      </p:sp>
+    </p:spTree>
+  </p:cSld>
+  <p:clrMapOvr>
+    <a:masterClrMapping/>
+  </p:clrMapOvr>
+</p:sld>
+</file>
+
+<file path=ppt/slides/slide15.xml><?xml version="1.0" encoding="utf-8"?>
+<p:sld xmlns:a="http://schemas.openxmlformats.org/drawingml/2006/main" xmlns:r="http://schemas.openxmlformats.org/officeDocument/2006/relationships" xmlns:p="http://schemas.openxmlformats.org/presentationml/2006/main">
+  <p:cSld name="Slide 15">
     <p:bg>
       <p:bgPr>
         <a:solidFill>
